--- a/public/lessons/year-6-maths/spring/week-18/simplify-ratios/teaching-powerpoint-v1.pptx
+++ b/public/lessons/year-6-maths/spring/week-18/simplify-ratios/teaching-powerpoint-v1.pptx
@@ -2,24 +2,24 @@
 <file path=ppt/presentation.xml><?xml version="1.0" encoding="utf-8"?>
 <p:presentation xmlns:p="http://schemas.openxmlformats.org/presentationml/2006/main">
   <p:sldMasterIdLst>
-    <p:sldMasterId xmlns:r="http://schemas.openxmlformats.org/officeDocument/2006/relationships" id="2147483648" r:id="R2d44510b8c0246cf"/>
+    <p:sldMasterId xmlns:r="http://schemas.openxmlformats.org/officeDocument/2006/relationships" id="2147483648" r:id="Ra4df169e808f41e9"/>
   </p:sldMasterIdLst>
   <p:notesMasterIdLst>
-    <p:notesMasterId xmlns:r="http://schemas.openxmlformats.org/officeDocument/2006/relationships" r:id="R1b0c3f5779914298"/>
+    <p:notesMasterId xmlns:r="http://schemas.openxmlformats.org/officeDocument/2006/relationships" r:id="R697df6ef962f4e28"/>
   </p:notesMasterIdLst>
   <p:sldIdLst>
-    <p:sldId xmlns:r="http://schemas.openxmlformats.org/officeDocument/2006/relationships" id="256" r:id="R60f299982a6f418d"/>
-    <p:sldId xmlns:r="http://schemas.openxmlformats.org/officeDocument/2006/relationships" id="257" r:id="R2348289a7d2041b4"/>
-    <p:sldId xmlns:r="http://schemas.openxmlformats.org/officeDocument/2006/relationships" id="258" r:id="R51a962dd28b94475"/>
-    <p:sldId xmlns:r="http://schemas.openxmlformats.org/officeDocument/2006/relationships" id="259" r:id="R0e699b61de0f4224"/>
-    <p:sldId xmlns:r="http://schemas.openxmlformats.org/officeDocument/2006/relationships" id="260" r:id="Rc8bf632bbdbe4d2a"/>
-    <p:sldId xmlns:r="http://schemas.openxmlformats.org/officeDocument/2006/relationships" id="261" r:id="R3616063f119d4903"/>
-    <p:sldId xmlns:r="http://schemas.openxmlformats.org/officeDocument/2006/relationships" id="262" r:id="R85a9c95ba8ea413a"/>
-    <p:sldId xmlns:r="http://schemas.openxmlformats.org/officeDocument/2006/relationships" id="263" r:id="Rf042349cd9584e4c"/>
-    <p:sldId xmlns:r="http://schemas.openxmlformats.org/officeDocument/2006/relationships" id="264" r:id="Rf7f702122161432d"/>
-    <p:sldId xmlns:r="http://schemas.openxmlformats.org/officeDocument/2006/relationships" id="265" r:id="R3b09be5cddee4591"/>
-    <p:sldId xmlns:r="http://schemas.openxmlformats.org/officeDocument/2006/relationships" id="266" r:id="R99c833db1afb4b3d"/>
-    <p:sldId xmlns:r="http://schemas.openxmlformats.org/officeDocument/2006/relationships" id="267" r:id="R55194d6de27e4c36"/>
+    <p:sldId xmlns:r="http://schemas.openxmlformats.org/officeDocument/2006/relationships" id="256" r:id="Rddb154404de94796"/>
+    <p:sldId xmlns:r="http://schemas.openxmlformats.org/officeDocument/2006/relationships" id="257" r:id="Rad716f06e9174635"/>
+    <p:sldId xmlns:r="http://schemas.openxmlformats.org/officeDocument/2006/relationships" id="258" r:id="R528704ba4e894b06"/>
+    <p:sldId xmlns:r="http://schemas.openxmlformats.org/officeDocument/2006/relationships" id="259" r:id="R9ae1aa868e664d12"/>
+    <p:sldId xmlns:r="http://schemas.openxmlformats.org/officeDocument/2006/relationships" id="260" r:id="R923ed22570a04bfc"/>
+    <p:sldId xmlns:r="http://schemas.openxmlformats.org/officeDocument/2006/relationships" id="261" r:id="Ra6aa1571b5354459"/>
+    <p:sldId xmlns:r="http://schemas.openxmlformats.org/officeDocument/2006/relationships" id="262" r:id="R6f0927edfbf54739"/>
+    <p:sldId xmlns:r="http://schemas.openxmlformats.org/officeDocument/2006/relationships" id="263" r:id="R0b7b104d03ae44db"/>
+    <p:sldId xmlns:r="http://schemas.openxmlformats.org/officeDocument/2006/relationships" id="264" r:id="R275477dd2c8845d6"/>
+    <p:sldId xmlns:r="http://schemas.openxmlformats.org/officeDocument/2006/relationships" id="265" r:id="R302b0ea6288b4c30"/>
+    <p:sldId xmlns:r="http://schemas.openxmlformats.org/officeDocument/2006/relationships" id="266" r:id="R22c13a01f5854edc"/>
+    <p:sldId xmlns:r="http://schemas.openxmlformats.org/officeDocument/2006/relationships" id="267" r:id="R333c6724d41445f1"/>
   </p:sldIdLst>
   <p:sldSz cx="12192000" cy="6858000"/>
   <p:notesSz cx="6858000" cy="9144000"/>
@@ -873,7 +873,7 @@
           <a:lstStyle xmlns:a="http://schemas.openxmlformats.org/drawingml/2006/main"/>
           <a:p xmlns:a="http://schemas.openxmlformats.org/drawingml/2006/main">
             <a:r>
-              <a:t>I do. Reveal the question, setup and each calculation stage one click at a time. Pupils watch before copying. Model answer: 3:4.</a:t>
+              <a:t>I do. Reveal the question, then reveal each mathematical change one click at a time. Point to the numbers and operation that changed before moving to the next line. Final answer: 3:4.</a:t>
             </a:r>
           </a:p>
         </p:txBody>
@@ -1291,7 +1291,7 @@
   </p:cSld>
   <p:clrMap bg1="lt1" tx1="dk1" bg2="lt2" tx2="dk2" accent1="accent1" accent2="accent2" accent3="accent3" accent4="accent4" accent5="accent5" accent6="accent6" hlink="hlink" folHlink="folHlink"/>
   <p:sldLayoutIdLst>
-    <p:sldLayoutId xmlns:r="http://schemas.openxmlformats.org/officeDocument/2006/relationships" id="2147483649" r:id="R2f5f269cafcd48aa"/>
+    <p:sldLayoutId xmlns:r="http://schemas.openxmlformats.org/officeDocument/2006/relationships" id="2147483649" r:id="R93fe455dbc7e41a0"/>
   </p:sldLayoutIdLst>
   <p:txStyles>
     <p:titleStyle>
@@ -1842,7 +1842,7 @@
           <p:cNvPr id="12" name="">
             <a:extLst xmlns:a="http://schemas.openxmlformats.org/drawingml/2006/main">
               <a:ext uri="{FF2B5EF4-FFF2-40B4-BE49-F238E27FC236}">
-                <a16:creationId xmlns:a16="http://schemas.microsoft.com/office/drawing/2014/main" id="{3B6F3174-812D-42BD-8334-FF406A35F178}"/>
+                <a16:creationId xmlns:a16="http://schemas.microsoft.com/office/drawing/2014/main" id="{347A494A-190B-4D8C-935D-CC0F016245F2}"/>
               </a:ext>
             </a:extLst>
           </p:cNvPr>
@@ -1874,7 +1874,7 @@
           <p:cNvPr id="2" name="">
             <a:extLst xmlns:a="http://schemas.openxmlformats.org/drawingml/2006/main">
               <a:ext uri="{FF2B5EF4-FFF2-40B4-BE49-F238E27FC236}">
-                <a16:creationId xmlns:a16="http://schemas.microsoft.com/office/drawing/2014/main" id="{0B44D2DD-BD22-4852-9155-5CBB573CE3BE}"/>
+                <a16:creationId xmlns:a16="http://schemas.microsoft.com/office/drawing/2014/main" id="{F27D0D75-7A66-47E2-8367-37990F12F485}"/>
               </a:ext>
             </a:extLst>
           </p:cNvPr>
@@ -1931,7 +1931,7 @@
           <p:cNvPr id="3" name="">
             <a:extLst xmlns:a="http://schemas.openxmlformats.org/drawingml/2006/main">
               <a:ext uri="{FF2B5EF4-FFF2-40B4-BE49-F238E27FC236}">
-                <a16:creationId xmlns:a16="http://schemas.microsoft.com/office/drawing/2014/main" id="{9E0E55A4-C305-4C15-955D-A2D9421549CC}"/>
+                <a16:creationId xmlns:a16="http://schemas.microsoft.com/office/drawing/2014/main" id="{F58DC200-EF87-4284-A493-48A2D5034194}"/>
               </a:ext>
             </a:extLst>
           </p:cNvPr>
@@ -1965,7 +1965,7 @@
           <p:cNvPr id="4" name="">
             <a:extLst xmlns:a="http://schemas.openxmlformats.org/drawingml/2006/main">
               <a:ext uri="{FF2B5EF4-FFF2-40B4-BE49-F238E27FC236}">
-                <a16:creationId xmlns:a16="http://schemas.microsoft.com/office/drawing/2014/main" id="{AFC3B1E9-C51D-42DA-A719-BBD52C956B60}"/>
+                <a16:creationId xmlns:a16="http://schemas.microsoft.com/office/drawing/2014/main" id="{A7D04D84-7E43-4C5F-86E6-4944FD6693F6}"/>
               </a:ext>
             </a:extLst>
           </p:cNvPr>
@@ -2022,7 +2022,7 @@
           <p:cNvPr id="5" name="">
             <a:extLst xmlns:a="http://schemas.openxmlformats.org/drawingml/2006/main">
               <a:ext uri="{FF2B5EF4-FFF2-40B4-BE49-F238E27FC236}">
-                <a16:creationId xmlns:a16="http://schemas.microsoft.com/office/drawing/2014/main" id="{6EE71501-6C3C-4AC3-ABA6-8FCD3CA9F51B}"/>
+                <a16:creationId xmlns:a16="http://schemas.microsoft.com/office/drawing/2014/main" id="{2EE788AD-2903-4C3D-8098-B73FF579AE1B}"/>
               </a:ext>
             </a:extLst>
           </p:cNvPr>
@@ -2079,7 +2079,7 @@
           <p:cNvPr id="6" name="">
             <a:extLst xmlns:a="http://schemas.openxmlformats.org/drawingml/2006/main">
               <a:ext uri="{FF2B5EF4-FFF2-40B4-BE49-F238E27FC236}">
-                <a16:creationId xmlns:a16="http://schemas.microsoft.com/office/drawing/2014/main" id="{909CE40A-2D75-4FA0-8454-3388BB7921E0}"/>
+                <a16:creationId xmlns:a16="http://schemas.microsoft.com/office/drawing/2014/main" id="{C08DB8FA-9B86-4D13-B3B7-C09F7DB46C18}"/>
               </a:ext>
             </a:extLst>
           </p:cNvPr>
@@ -2113,7 +2113,7 @@
           <p:cNvPr id="7" name="">
             <a:extLst xmlns:a="http://schemas.openxmlformats.org/drawingml/2006/main">
               <a:ext uri="{FF2B5EF4-FFF2-40B4-BE49-F238E27FC236}">
-                <a16:creationId xmlns:a16="http://schemas.microsoft.com/office/drawing/2014/main" id="{4B365CCD-7ADE-43C4-9B95-8FF3D6109BA6}"/>
+                <a16:creationId xmlns:a16="http://schemas.microsoft.com/office/drawing/2014/main" id="{E9C64736-1CE7-46C7-A73E-D6D1C80FDABA}"/>
               </a:ext>
             </a:extLst>
           </p:cNvPr>
@@ -2170,7 +2170,7 @@
           <p:cNvPr id="8" name="">
             <a:extLst xmlns:a="http://schemas.openxmlformats.org/drawingml/2006/main">
               <a:ext uri="{FF2B5EF4-FFF2-40B4-BE49-F238E27FC236}">
-                <a16:creationId xmlns:a16="http://schemas.microsoft.com/office/drawing/2014/main" id="{74952CFA-647B-44C8-A756-75D18D7A3187}"/>
+                <a16:creationId xmlns:a16="http://schemas.microsoft.com/office/drawing/2014/main" id="{D95CEB07-1B17-41A6-B0A1-8D8B022E9D1E}"/>
               </a:ext>
             </a:extLst>
           </p:cNvPr>
@@ -2227,7 +2227,7 @@
           <p:cNvPr id="9" name="">
             <a:extLst xmlns:a="http://schemas.openxmlformats.org/drawingml/2006/main">
               <a:ext uri="{FF2B5EF4-FFF2-40B4-BE49-F238E27FC236}">
-                <a16:creationId xmlns:a16="http://schemas.microsoft.com/office/drawing/2014/main" id="{0368F04C-D28B-40F3-813E-E08556D84280}"/>
+                <a16:creationId xmlns:a16="http://schemas.microsoft.com/office/drawing/2014/main" id="{E2A902AC-1254-47B7-8A0C-576AFFD4CAFA}"/>
               </a:ext>
             </a:extLst>
           </p:cNvPr>
@@ -2284,7 +2284,7 @@
           <p:cNvPr id="10" name="">
             <a:extLst xmlns:a="http://schemas.openxmlformats.org/drawingml/2006/main">
               <a:ext uri="{FF2B5EF4-FFF2-40B4-BE49-F238E27FC236}">
-                <a16:creationId xmlns:a16="http://schemas.microsoft.com/office/drawing/2014/main" id="{FE998598-B37A-4682-AF92-673D255FEA18}"/>
+                <a16:creationId xmlns:a16="http://schemas.microsoft.com/office/drawing/2014/main" id="{64EE08BF-1C49-4645-B461-B73900237029}"/>
               </a:ext>
             </a:extLst>
           </p:cNvPr>
@@ -2341,7 +2341,7 @@
           <p:cNvPr id="11" name="">
             <a:extLst xmlns:a="http://schemas.openxmlformats.org/drawingml/2006/main">
               <a:ext uri="{FF2B5EF4-FFF2-40B4-BE49-F238E27FC236}">
-                <a16:creationId xmlns:a16="http://schemas.microsoft.com/office/drawing/2014/main" id="{6D1B9E95-495C-46E0-B2E1-66C0858809AF}"/>
+                <a16:creationId xmlns:a16="http://schemas.microsoft.com/office/drawing/2014/main" id="{B7C61E97-189B-4249-A6DD-70644FDD38B6}"/>
               </a:ext>
             </a:extLst>
           </p:cNvPr>
@@ -2396,7 +2396,7 @@
     </p:spTree>
     <p:extLst>
       <p:ext uri="{BB962C8B-B14F-4D97-AF65-F5344CB8AC3E}">
-        <p14:creationId xmlns:p14="http://schemas.microsoft.com/office/powerpoint/2010/main" val="639504095"/>
+        <p14:creationId xmlns:p14="http://schemas.microsoft.com/office/powerpoint/2010/main" val="561487566"/>
       </p:ext>
     </p:extLst>
   </p:cSld>
@@ -2427,7 +2427,7 @@
           <p:cNvPr id="14" name="">
             <a:extLst xmlns:a="http://schemas.openxmlformats.org/drawingml/2006/main">
               <a:ext uri="{FF2B5EF4-FFF2-40B4-BE49-F238E27FC236}">
-                <a16:creationId xmlns:a16="http://schemas.microsoft.com/office/drawing/2014/main" id="{9521D1D6-3BAF-49BA-BF46-D9A0B7E61791}"/>
+                <a16:creationId xmlns:a16="http://schemas.microsoft.com/office/drawing/2014/main" id="{D1494F3E-19EE-4F9B-A73E-A37D24A7BAC6}"/>
               </a:ext>
             </a:extLst>
           </p:cNvPr>
@@ -2459,7 +2459,7 @@
           <p:cNvPr id="2" name="">
             <a:extLst xmlns:a="http://schemas.openxmlformats.org/drawingml/2006/main">
               <a:ext uri="{FF2B5EF4-FFF2-40B4-BE49-F238E27FC236}">
-                <a16:creationId xmlns:a16="http://schemas.microsoft.com/office/drawing/2014/main" id="{8A88E0AD-5EC8-4C72-B7F8-2B19771B2830}"/>
+                <a16:creationId xmlns:a16="http://schemas.microsoft.com/office/drawing/2014/main" id="{8AC50CB9-7F0A-4D3A-9A2F-F42C4DBCA803}"/>
               </a:ext>
             </a:extLst>
           </p:cNvPr>
@@ -2516,7 +2516,7 @@
           <p:cNvPr id="3" name="">
             <a:extLst xmlns:a="http://schemas.openxmlformats.org/drawingml/2006/main">
               <a:ext uri="{FF2B5EF4-FFF2-40B4-BE49-F238E27FC236}">
-                <a16:creationId xmlns:a16="http://schemas.microsoft.com/office/drawing/2014/main" id="{5A7388C2-E2EE-4A46-B863-2E0B8403D7B0}"/>
+                <a16:creationId xmlns:a16="http://schemas.microsoft.com/office/drawing/2014/main" id="{C7CE5095-05BB-4A25-9241-8C8F73DA6E6A}"/>
               </a:ext>
             </a:extLst>
           </p:cNvPr>
@@ -2548,7 +2548,7 @@
           <p:cNvPr id="4" name="">
             <a:extLst xmlns:a="http://schemas.openxmlformats.org/drawingml/2006/main">
               <a:ext uri="{FF2B5EF4-FFF2-40B4-BE49-F238E27FC236}">
-                <a16:creationId xmlns:a16="http://schemas.microsoft.com/office/drawing/2014/main" id="{0D2C82ED-DC5C-46BD-BB03-0400DF1B278C}"/>
+                <a16:creationId xmlns:a16="http://schemas.microsoft.com/office/drawing/2014/main" id="{5F259394-E6B8-422E-8905-4353A5B18C46}"/>
               </a:ext>
             </a:extLst>
           </p:cNvPr>
@@ -2605,7 +2605,7 @@
           <p:cNvPr id="5" name="">
             <a:extLst xmlns:a="http://schemas.openxmlformats.org/drawingml/2006/main">
               <a:ext uri="{FF2B5EF4-FFF2-40B4-BE49-F238E27FC236}">
-                <a16:creationId xmlns:a16="http://schemas.microsoft.com/office/drawing/2014/main" id="{9B927243-02FB-47F0-859C-2C8319F34B96}"/>
+                <a16:creationId xmlns:a16="http://schemas.microsoft.com/office/drawing/2014/main" id="{167EC161-FF8D-430F-A56D-4294BD98FBBA}"/>
               </a:ext>
             </a:extLst>
           </p:cNvPr>
@@ -2662,7 +2662,7 @@
           <p:cNvPr id="6" name="">
             <a:extLst xmlns:a="http://schemas.openxmlformats.org/drawingml/2006/main">
               <a:ext uri="{FF2B5EF4-FFF2-40B4-BE49-F238E27FC236}">
-                <a16:creationId xmlns:a16="http://schemas.microsoft.com/office/drawing/2014/main" id="{02367956-D5EC-4838-A253-66F275AABF63}"/>
+                <a16:creationId xmlns:a16="http://schemas.microsoft.com/office/drawing/2014/main" id="{1D954A3F-586C-43BB-BEED-FD11D1881C35}"/>
               </a:ext>
             </a:extLst>
           </p:cNvPr>
@@ -2719,7 +2719,7 @@
           <p:cNvPr id="7" name="">
             <a:extLst xmlns:a="http://schemas.openxmlformats.org/drawingml/2006/main">
               <a:ext uri="{FF2B5EF4-FFF2-40B4-BE49-F238E27FC236}">
-                <a16:creationId xmlns:a16="http://schemas.microsoft.com/office/drawing/2014/main" id="{FC9E80F8-A402-4865-AF9E-C27FC2ED2870}"/>
+                <a16:creationId xmlns:a16="http://schemas.microsoft.com/office/drawing/2014/main" id="{A394D385-99EE-47FE-AC76-9AFBE0D479B2}"/>
               </a:ext>
             </a:extLst>
           </p:cNvPr>
@@ -2751,7 +2751,7 @@
           <p:cNvPr id="8" name="">
             <a:extLst xmlns:a="http://schemas.openxmlformats.org/drawingml/2006/main">
               <a:ext uri="{FF2B5EF4-FFF2-40B4-BE49-F238E27FC236}">
-                <a16:creationId xmlns:a16="http://schemas.microsoft.com/office/drawing/2014/main" id="{6241A389-3B14-4A84-BAE0-FAA374158DE0}"/>
+                <a16:creationId xmlns:a16="http://schemas.microsoft.com/office/drawing/2014/main" id="{E3191F3E-B52D-4127-A3F7-C31D5E643955}"/>
               </a:ext>
             </a:extLst>
           </p:cNvPr>
@@ -2808,7 +2808,7 @@
           <p:cNvPr id="9" name="">
             <a:extLst xmlns:a="http://schemas.openxmlformats.org/drawingml/2006/main">
               <a:ext uri="{FF2B5EF4-FFF2-40B4-BE49-F238E27FC236}">
-                <a16:creationId xmlns:a16="http://schemas.microsoft.com/office/drawing/2014/main" id="{07DD2780-214A-44E4-A5B9-9B836397DADE}"/>
+                <a16:creationId xmlns:a16="http://schemas.microsoft.com/office/drawing/2014/main" id="{7B6F053A-0285-4331-9495-8CFFC279C217}"/>
               </a:ext>
             </a:extLst>
           </p:cNvPr>
@@ -2865,7 +2865,7 @@
           <p:cNvPr id="10" name="">
             <a:extLst xmlns:a="http://schemas.openxmlformats.org/drawingml/2006/main">
               <a:ext uri="{FF2B5EF4-FFF2-40B4-BE49-F238E27FC236}">
-                <a16:creationId xmlns:a16="http://schemas.microsoft.com/office/drawing/2014/main" id="{A27C4CEF-3955-450A-AD79-26663770C37B}"/>
+                <a16:creationId xmlns:a16="http://schemas.microsoft.com/office/drawing/2014/main" id="{3D052C0A-26F2-48B5-9C98-6E11326B0B2F}"/>
               </a:ext>
             </a:extLst>
           </p:cNvPr>
@@ -2922,7 +2922,7 @@
           <p:cNvPr id="11" name="">
             <a:extLst xmlns:a="http://schemas.openxmlformats.org/drawingml/2006/main">
               <a:ext uri="{FF2B5EF4-FFF2-40B4-BE49-F238E27FC236}">
-                <a16:creationId xmlns:a16="http://schemas.microsoft.com/office/drawing/2014/main" id="{F546DEB7-4F40-4E5B-817D-79DEAB263520}"/>
+                <a16:creationId xmlns:a16="http://schemas.microsoft.com/office/drawing/2014/main" id="{6E0D846A-3806-4FAD-AC44-160E4584E1BB}"/>
               </a:ext>
             </a:extLst>
           </p:cNvPr>
@@ -2979,7 +2979,7 @@
           <p:cNvPr id="12" name="">
             <a:extLst xmlns:a="http://schemas.openxmlformats.org/drawingml/2006/main">
               <a:ext uri="{FF2B5EF4-FFF2-40B4-BE49-F238E27FC236}">
-                <a16:creationId xmlns:a16="http://schemas.microsoft.com/office/drawing/2014/main" id="{9778DBE1-E8F3-4F86-81CD-1BE931A36D0B}"/>
+                <a16:creationId xmlns:a16="http://schemas.microsoft.com/office/drawing/2014/main" id="{57E9509E-9FF5-4C99-B6D9-284A94A99FF5}"/>
               </a:ext>
             </a:extLst>
           </p:cNvPr>
@@ -3036,7 +3036,7 @@
           <p:cNvPr id="13" name="">
             <a:extLst xmlns:a="http://schemas.openxmlformats.org/drawingml/2006/main">
               <a:ext uri="{FF2B5EF4-FFF2-40B4-BE49-F238E27FC236}">
-                <a16:creationId xmlns:a16="http://schemas.microsoft.com/office/drawing/2014/main" id="{7A8F2515-A9AC-49A1-9C87-3A84421DE21C}"/>
+                <a16:creationId xmlns:a16="http://schemas.microsoft.com/office/drawing/2014/main" id="{1BC92B55-FB02-47BF-A74C-F7B30835A0F7}"/>
               </a:ext>
             </a:extLst>
           </p:cNvPr>
@@ -3091,7 +3091,7 @@
     </p:spTree>
     <p:extLst>
       <p:ext uri="{BB962C8B-B14F-4D97-AF65-F5344CB8AC3E}">
-        <p14:creationId xmlns:p14="http://schemas.microsoft.com/office/powerpoint/2010/main" val="625815407"/>
+        <p14:creationId xmlns:p14="http://schemas.microsoft.com/office/powerpoint/2010/main" val="817314823"/>
       </p:ext>
     </p:extLst>
   </p:cSld>
@@ -3292,7 +3292,7 @@
           <p:cNvPr id="19" name="">
             <a:extLst xmlns:a="http://schemas.openxmlformats.org/drawingml/2006/main">
               <a:ext uri="{FF2B5EF4-FFF2-40B4-BE49-F238E27FC236}">
-                <a16:creationId xmlns:a16="http://schemas.microsoft.com/office/drawing/2014/main" id="{F18EB7FE-B481-4B5F-84B7-EDC5DC4C31F8}"/>
+                <a16:creationId xmlns:a16="http://schemas.microsoft.com/office/drawing/2014/main" id="{8F542863-D50F-4259-8E72-713C6018C94E}"/>
               </a:ext>
             </a:extLst>
           </p:cNvPr>
@@ -3324,7 +3324,7 @@
           <p:cNvPr id="2" name="">
             <a:extLst xmlns:a="http://schemas.openxmlformats.org/drawingml/2006/main">
               <a:ext uri="{FF2B5EF4-FFF2-40B4-BE49-F238E27FC236}">
-                <a16:creationId xmlns:a16="http://schemas.microsoft.com/office/drawing/2014/main" id="{719BE839-CEF7-4A0A-97C7-EF9C9BC2487F}"/>
+                <a16:creationId xmlns:a16="http://schemas.microsoft.com/office/drawing/2014/main" id="{DAD56AE9-40CF-4667-B600-0A8A96FCC38E}"/>
               </a:ext>
             </a:extLst>
           </p:cNvPr>
@@ -3381,7 +3381,7 @@
           <p:cNvPr id="3" name="">
             <a:extLst xmlns:a="http://schemas.openxmlformats.org/drawingml/2006/main">
               <a:ext uri="{FF2B5EF4-FFF2-40B4-BE49-F238E27FC236}">
-                <a16:creationId xmlns:a16="http://schemas.microsoft.com/office/drawing/2014/main" id="{3E553F80-3C82-43FF-B6F6-288F8CDCB4CA}"/>
+                <a16:creationId xmlns:a16="http://schemas.microsoft.com/office/drawing/2014/main" id="{0E1E9A5D-3847-4616-9273-7F75990BAF79}"/>
               </a:ext>
             </a:extLst>
           </p:cNvPr>
@@ -3413,7 +3413,7 @@
           <p:cNvPr id="4" name="">
             <a:extLst xmlns:a="http://schemas.openxmlformats.org/drawingml/2006/main">
               <a:ext uri="{FF2B5EF4-FFF2-40B4-BE49-F238E27FC236}">
-                <a16:creationId xmlns:a16="http://schemas.microsoft.com/office/drawing/2014/main" id="{E1D6FFD2-D851-4D3D-9A58-E4AF4065479B}"/>
+                <a16:creationId xmlns:a16="http://schemas.microsoft.com/office/drawing/2014/main" id="{07BED4B6-DF85-442D-940F-31788B148DFF}"/>
               </a:ext>
             </a:extLst>
           </p:cNvPr>
@@ -3470,7 +3470,7 @@
           <p:cNvPr id="5" name="">
             <a:extLst xmlns:a="http://schemas.openxmlformats.org/drawingml/2006/main">
               <a:ext uri="{FF2B5EF4-FFF2-40B4-BE49-F238E27FC236}">
-                <a16:creationId xmlns:a16="http://schemas.microsoft.com/office/drawing/2014/main" id="{DBCE0620-BCF4-4E6E-B3C0-773D9D569E83}"/>
+                <a16:creationId xmlns:a16="http://schemas.microsoft.com/office/drawing/2014/main" id="{D7F1852A-B4A4-450D-9420-353498F26B24}"/>
               </a:ext>
             </a:extLst>
           </p:cNvPr>
@@ -3527,7 +3527,7 @@
           <p:cNvPr id="6" name="">
             <a:extLst xmlns:a="http://schemas.openxmlformats.org/drawingml/2006/main">
               <a:ext uri="{FF2B5EF4-FFF2-40B4-BE49-F238E27FC236}">
-                <a16:creationId xmlns:a16="http://schemas.microsoft.com/office/drawing/2014/main" id="{12EDC736-9DBB-4A7D-B23A-B38FA3BDAB2C}"/>
+                <a16:creationId xmlns:a16="http://schemas.microsoft.com/office/drawing/2014/main" id="{9A8027CB-CC29-45C6-9992-6E9450B5EE0F}"/>
               </a:ext>
             </a:extLst>
           </p:cNvPr>
@@ -3584,7 +3584,7 @@
           <p:cNvPr id="7" name="">
             <a:extLst xmlns:a="http://schemas.openxmlformats.org/drawingml/2006/main">
               <a:ext uri="{FF2B5EF4-FFF2-40B4-BE49-F238E27FC236}">
-                <a16:creationId xmlns:a16="http://schemas.microsoft.com/office/drawing/2014/main" id="{9BCE3A1B-60FB-4B52-BF0B-D58FF7D61D35}"/>
+                <a16:creationId xmlns:a16="http://schemas.microsoft.com/office/drawing/2014/main" id="{D9887449-AF5D-47A5-BA10-BB12D9399803}"/>
               </a:ext>
             </a:extLst>
           </p:cNvPr>
@@ -3616,7 +3616,7 @@
           <p:cNvPr id="8" name="">
             <a:extLst xmlns:a="http://schemas.openxmlformats.org/drawingml/2006/main">
               <a:ext uri="{FF2B5EF4-FFF2-40B4-BE49-F238E27FC236}">
-                <a16:creationId xmlns:a16="http://schemas.microsoft.com/office/drawing/2014/main" id="{6490C53E-7A4E-4577-A8DB-913721A1ECE9}"/>
+                <a16:creationId xmlns:a16="http://schemas.microsoft.com/office/drawing/2014/main" id="{DED19D21-8AA4-442A-8536-23E155FDF2B6}"/>
               </a:ext>
             </a:extLst>
           </p:cNvPr>
@@ -3673,7 +3673,7 @@
           <p:cNvPr id="9" name="">
             <a:extLst xmlns:a="http://schemas.openxmlformats.org/drawingml/2006/main">
               <a:ext uri="{FF2B5EF4-FFF2-40B4-BE49-F238E27FC236}">
-                <a16:creationId xmlns:a16="http://schemas.microsoft.com/office/drawing/2014/main" id="{F451C3FB-E850-4E41-8DD0-5E3F7D6D9214}"/>
+                <a16:creationId xmlns:a16="http://schemas.microsoft.com/office/drawing/2014/main" id="{FAC22E6B-2F1F-4CEA-8D5A-F8D03E0467BD}"/>
               </a:ext>
             </a:extLst>
           </p:cNvPr>
@@ -3730,7 +3730,7 @@
           <p:cNvPr id="10" name="">
             <a:extLst xmlns:a="http://schemas.openxmlformats.org/drawingml/2006/main">
               <a:ext uri="{FF2B5EF4-FFF2-40B4-BE49-F238E27FC236}">
-                <a16:creationId xmlns:a16="http://schemas.microsoft.com/office/drawing/2014/main" id="{9BECC4B7-DB18-4210-A15B-3ADC786BECE6}"/>
+                <a16:creationId xmlns:a16="http://schemas.microsoft.com/office/drawing/2014/main" id="{554D169F-8A2F-4020-ADCE-C6904E47BFF3}"/>
               </a:ext>
             </a:extLst>
           </p:cNvPr>
@@ -3787,7 +3787,7 @@
           <p:cNvPr id="11" name="">
             <a:extLst xmlns:a="http://schemas.openxmlformats.org/drawingml/2006/main">
               <a:ext uri="{FF2B5EF4-FFF2-40B4-BE49-F238E27FC236}">
-                <a16:creationId xmlns:a16="http://schemas.microsoft.com/office/drawing/2014/main" id="{E18F63E0-9D1F-4AF2-A0CA-342198E969E4}"/>
+                <a16:creationId xmlns:a16="http://schemas.microsoft.com/office/drawing/2014/main" id="{9BE60D77-E766-4E1F-8E17-FAE7E6FEB4E6}"/>
               </a:ext>
             </a:extLst>
           </p:cNvPr>
@@ -3821,7 +3821,7 @@
           <p:cNvPr id="12" name="">
             <a:extLst xmlns:a="http://schemas.openxmlformats.org/drawingml/2006/main">
               <a:ext uri="{FF2B5EF4-FFF2-40B4-BE49-F238E27FC236}">
-                <a16:creationId xmlns:a16="http://schemas.microsoft.com/office/drawing/2014/main" id="{3AADFAC6-B28E-4FB1-B94D-EA491E87A764}"/>
+                <a16:creationId xmlns:a16="http://schemas.microsoft.com/office/drawing/2014/main" id="{3F8E9FEC-EC67-4715-BA9A-18E6E49EC848}"/>
               </a:ext>
             </a:extLst>
           </p:cNvPr>
@@ -3878,7 +3878,7 @@
           <p:cNvPr id="13" name="">
             <a:extLst xmlns:a="http://schemas.openxmlformats.org/drawingml/2006/main">
               <a:ext uri="{FF2B5EF4-FFF2-40B4-BE49-F238E27FC236}">
-                <a16:creationId xmlns:a16="http://schemas.microsoft.com/office/drawing/2014/main" id="{01EEA05F-16A9-443E-8D91-F70D52673F18}"/>
+                <a16:creationId xmlns:a16="http://schemas.microsoft.com/office/drawing/2014/main" id="{33536265-1A32-4AC4-B260-3E686819454B}"/>
               </a:ext>
             </a:extLst>
           </p:cNvPr>
@@ -3935,7 +3935,7 @@
           <p:cNvPr id="14" name="">
             <a:extLst xmlns:a="http://schemas.openxmlformats.org/drawingml/2006/main">
               <a:ext uri="{FF2B5EF4-FFF2-40B4-BE49-F238E27FC236}">
-                <a16:creationId xmlns:a16="http://schemas.microsoft.com/office/drawing/2014/main" id="{56167677-2D4A-4CFB-A990-27B3C43BB04D}"/>
+                <a16:creationId xmlns:a16="http://schemas.microsoft.com/office/drawing/2014/main" id="{71B70AF7-CFA1-4265-B0B9-311870299F91}"/>
               </a:ext>
             </a:extLst>
           </p:cNvPr>
@@ -3992,7 +3992,7 @@
           <p:cNvPr id="15" name="">
             <a:extLst xmlns:a="http://schemas.openxmlformats.org/drawingml/2006/main">
               <a:ext uri="{FF2B5EF4-FFF2-40B4-BE49-F238E27FC236}">
-                <a16:creationId xmlns:a16="http://schemas.microsoft.com/office/drawing/2014/main" id="{8AB0D18D-914E-43E7-8BE5-2F2351C5D870}"/>
+                <a16:creationId xmlns:a16="http://schemas.microsoft.com/office/drawing/2014/main" id="{9C3C2EB1-0466-44BD-9CC5-1D3F37F7FB86}"/>
               </a:ext>
             </a:extLst>
           </p:cNvPr>
@@ -4026,7 +4026,7 @@
           <p:cNvPr id="16" name="">
             <a:extLst xmlns:a="http://schemas.openxmlformats.org/drawingml/2006/main">
               <a:ext uri="{FF2B5EF4-FFF2-40B4-BE49-F238E27FC236}">
-                <a16:creationId xmlns:a16="http://schemas.microsoft.com/office/drawing/2014/main" id="{13F9F09F-074A-4240-B047-AEDB376E908B}"/>
+                <a16:creationId xmlns:a16="http://schemas.microsoft.com/office/drawing/2014/main" id="{B3C255F5-872F-424C-99E9-A813674BE5A5}"/>
               </a:ext>
             </a:extLst>
           </p:cNvPr>
@@ -4083,7 +4083,7 @@
           <p:cNvPr id="17" name="">
             <a:extLst xmlns:a="http://schemas.openxmlformats.org/drawingml/2006/main">
               <a:ext uri="{FF2B5EF4-FFF2-40B4-BE49-F238E27FC236}">
-                <a16:creationId xmlns:a16="http://schemas.microsoft.com/office/drawing/2014/main" id="{24366072-2ECE-47DF-B07F-E95DF9065A6F}"/>
+                <a16:creationId xmlns:a16="http://schemas.microsoft.com/office/drawing/2014/main" id="{1234EAAB-9A0B-40F1-BC79-99E2357D0339}"/>
               </a:ext>
             </a:extLst>
           </p:cNvPr>
@@ -4140,7 +4140,7 @@
           <p:cNvPr id="18" name="">
             <a:extLst xmlns:a="http://schemas.openxmlformats.org/drawingml/2006/main">
               <a:ext uri="{FF2B5EF4-FFF2-40B4-BE49-F238E27FC236}">
-                <a16:creationId xmlns:a16="http://schemas.microsoft.com/office/drawing/2014/main" id="{31B20525-6905-4E7C-B1D8-684D42F29D52}"/>
+                <a16:creationId xmlns:a16="http://schemas.microsoft.com/office/drawing/2014/main" id="{72667A18-4220-4571-BFBB-F3F8AB06A108}"/>
               </a:ext>
             </a:extLst>
           </p:cNvPr>
@@ -4195,7 +4195,7 @@
     </p:spTree>
     <p:extLst>
       <p:ext uri="{BB962C8B-B14F-4D97-AF65-F5344CB8AC3E}">
-        <p14:creationId xmlns:p14="http://schemas.microsoft.com/office/powerpoint/2010/main" val="600441278"/>
+        <p14:creationId xmlns:p14="http://schemas.microsoft.com/office/powerpoint/2010/main" val="274826236"/>
       </p:ext>
     </p:extLst>
   </p:cSld>
@@ -4350,7 +4350,7 @@
           <p:cNvPr id="23" name="">
             <a:extLst xmlns:a="http://schemas.openxmlformats.org/drawingml/2006/main">
               <a:ext uri="{FF2B5EF4-FFF2-40B4-BE49-F238E27FC236}">
-                <a16:creationId xmlns:a16="http://schemas.microsoft.com/office/drawing/2014/main" id="{D0429D6B-94A1-4B63-A0E6-902CB5EEB2F8}"/>
+                <a16:creationId xmlns:a16="http://schemas.microsoft.com/office/drawing/2014/main" id="{3D2D4A7E-7887-4654-945B-2FCD2B51A9B3}"/>
               </a:ext>
             </a:extLst>
           </p:cNvPr>
@@ -4382,7 +4382,7 @@
           <p:cNvPr id="2" name="">
             <a:extLst xmlns:a="http://schemas.openxmlformats.org/drawingml/2006/main">
               <a:ext uri="{FF2B5EF4-FFF2-40B4-BE49-F238E27FC236}">
-                <a16:creationId xmlns:a16="http://schemas.microsoft.com/office/drawing/2014/main" id="{2D868229-ABF6-42FE-BF49-FE6ED8061437}"/>
+                <a16:creationId xmlns:a16="http://schemas.microsoft.com/office/drawing/2014/main" id="{652D2A6D-60C8-4A23-8F84-10BE6E5B9E1C}"/>
               </a:ext>
             </a:extLst>
           </p:cNvPr>
@@ -4439,7 +4439,7 @@
           <p:cNvPr id="3" name="">
             <a:extLst xmlns:a="http://schemas.openxmlformats.org/drawingml/2006/main">
               <a:ext uri="{FF2B5EF4-FFF2-40B4-BE49-F238E27FC236}">
-                <a16:creationId xmlns:a16="http://schemas.microsoft.com/office/drawing/2014/main" id="{D20FE05D-70A3-4B15-A66C-6A42BB3508C1}"/>
+                <a16:creationId xmlns:a16="http://schemas.microsoft.com/office/drawing/2014/main" id="{16E1B767-BF6E-458D-8849-0028EEFDDF16}"/>
               </a:ext>
             </a:extLst>
           </p:cNvPr>
@@ -4471,7 +4471,7 @@
           <p:cNvPr id="4" name="">
             <a:extLst xmlns:a="http://schemas.openxmlformats.org/drawingml/2006/main">
               <a:ext uri="{FF2B5EF4-FFF2-40B4-BE49-F238E27FC236}">
-                <a16:creationId xmlns:a16="http://schemas.microsoft.com/office/drawing/2014/main" id="{C7571983-4F33-4D64-BFC7-08CB30CE007F}"/>
+                <a16:creationId xmlns:a16="http://schemas.microsoft.com/office/drawing/2014/main" id="{E3987C96-63B0-4269-94F8-F28A3B8BC665}"/>
               </a:ext>
             </a:extLst>
           </p:cNvPr>
@@ -4528,7 +4528,7 @@
           <p:cNvPr id="5" name="">
             <a:extLst xmlns:a="http://schemas.openxmlformats.org/drawingml/2006/main">
               <a:ext uri="{FF2B5EF4-FFF2-40B4-BE49-F238E27FC236}">
-                <a16:creationId xmlns:a16="http://schemas.microsoft.com/office/drawing/2014/main" id="{1B1BD0C9-7186-4580-9B5E-FCCA060C32DA}"/>
+                <a16:creationId xmlns:a16="http://schemas.microsoft.com/office/drawing/2014/main" id="{C5DAE1EF-F1F1-4D2C-9AFC-F82B2B0DD379}"/>
               </a:ext>
             </a:extLst>
           </p:cNvPr>
@@ -4585,7 +4585,7 @@
           <p:cNvPr id="6" name="">
             <a:extLst xmlns:a="http://schemas.openxmlformats.org/drawingml/2006/main">
               <a:ext uri="{FF2B5EF4-FFF2-40B4-BE49-F238E27FC236}">
-                <a16:creationId xmlns:a16="http://schemas.microsoft.com/office/drawing/2014/main" id="{956A5427-1A28-4232-91A5-BBA976B15B08}"/>
+                <a16:creationId xmlns:a16="http://schemas.microsoft.com/office/drawing/2014/main" id="{2AE05E24-44DC-42A0-991E-BDCAF323FFA6}"/>
               </a:ext>
             </a:extLst>
           </p:cNvPr>
@@ -4642,7 +4642,7 @@
           <p:cNvPr id="7" name="">
             <a:extLst xmlns:a="http://schemas.openxmlformats.org/drawingml/2006/main">
               <a:ext uri="{FF2B5EF4-FFF2-40B4-BE49-F238E27FC236}">
-                <a16:creationId xmlns:a16="http://schemas.microsoft.com/office/drawing/2014/main" id="{1C3D8FB4-16AD-4FBC-A6D0-4D95BE438C53}"/>
+                <a16:creationId xmlns:a16="http://schemas.microsoft.com/office/drawing/2014/main" id="{85AD20FE-DAEA-4657-ADF8-CD2FC3A1368F}"/>
               </a:ext>
             </a:extLst>
           </p:cNvPr>
@@ -4674,7 +4674,7 @@
           <p:cNvPr id="8" name="">
             <a:extLst xmlns:a="http://schemas.openxmlformats.org/drawingml/2006/main">
               <a:ext uri="{FF2B5EF4-FFF2-40B4-BE49-F238E27FC236}">
-                <a16:creationId xmlns:a16="http://schemas.microsoft.com/office/drawing/2014/main" id="{350E69F6-73D2-4785-9984-E06C5416C25A}"/>
+                <a16:creationId xmlns:a16="http://schemas.microsoft.com/office/drawing/2014/main" id="{0CB63E09-6EB5-49D9-8A43-9621F66D8121}"/>
               </a:ext>
             </a:extLst>
           </p:cNvPr>
@@ -4731,7 +4731,7 @@
           <p:cNvPr id="9" name="">
             <a:extLst xmlns:a="http://schemas.openxmlformats.org/drawingml/2006/main">
               <a:ext uri="{FF2B5EF4-FFF2-40B4-BE49-F238E27FC236}">
-                <a16:creationId xmlns:a16="http://schemas.microsoft.com/office/drawing/2014/main" id="{501B907B-1FA9-43CC-8BF7-C6B75829925D}"/>
+                <a16:creationId xmlns:a16="http://schemas.microsoft.com/office/drawing/2014/main" id="{B06F18D9-E08C-401A-8A99-29342835A2E5}"/>
               </a:ext>
             </a:extLst>
           </p:cNvPr>
@@ -4788,7 +4788,7 @@
           <p:cNvPr id="10" name="">
             <a:extLst xmlns:a="http://schemas.openxmlformats.org/drawingml/2006/main">
               <a:ext uri="{FF2B5EF4-FFF2-40B4-BE49-F238E27FC236}">
-                <a16:creationId xmlns:a16="http://schemas.microsoft.com/office/drawing/2014/main" id="{D2C72A34-5EA0-4FAE-9850-4B12E51A71A4}"/>
+                <a16:creationId xmlns:a16="http://schemas.microsoft.com/office/drawing/2014/main" id="{6F603246-5882-433F-8A6F-E0AFD67713DE}"/>
               </a:ext>
             </a:extLst>
           </p:cNvPr>
@@ -4822,7 +4822,7 @@
           <p:cNvPr id="11" name="">
             <a:extLst xmlns:a="http://schemas.openxmlformats.org/drawingml/2006/main">
               <a:ext uri="{FF2B5EF4-FFF2-40B4-BE49-F238E27FC236}">
-                <a16:creationId xmlns:a16="http://schemas.microsoft.com/office/drawing/2014/main" id="{D8F098F6-9F6E-4D86-ABDC-E014052868E4}"/>
+                <a16:creationId xmlns:a16="http://schemas.microsoft.com/office/drawing/2014/main" id="{F61F3F85-E8F1-44D7-B8F4-8E3662D5DCD4}"/>
               </a:ext>
             </a:extLst>
           </p:cNvPr>
@@ -4854,7 +4854,7 @@
           <p:cNvPr id="12" name="">
             <a:extLst xmlns:a="http://schemas.openxmlformats.org/drawingml/2006/main">
               <a:ext uri="{FF2B5EF4-FFF2-40B4-BE49-F238E27FC236}">
-                <a16:creationId xmlns:a16="http://schemas.microsoft.com/office/drawing/2014/main" id="{90DE0341-0B2C-42A0-9ED5-9816F1186FA2}"/>
+                <a16:creationId xmlns:a16="http://schemas.microsoft.com/office/drawing/2014/main" id="{BB56E2CE-6235-4CF0-AF99-608487D9750A}"/>
               </a:ext>
             </a:extLst>
           </p:cNvPr>
@@ -4911,7 +4911,7 @@
           <p:cNvPr id="13" name="">
             <a:extLst xmlns:a="http://schemas.openxmlformats.org/drawingml/2006/main">
               <a:ext uri="{FF2B5EF4-FFF2-40B4-BE49-F238E27FC236}">
-                <a16:creationId xmlns:a16="http://schemas.microsoft.com/office/drawing/2014/main" id="{461C9ADC-2756-4DC1-92AF-220ACF2DB368}"/>
+                <a16:creationId xmlns:a16="http://schemas.microsoft.com/office/drawing/2014/main" id="{24BD821B-4D1F-4702-A251-F136578C8359}"/>
               </a:ext>
             </a:extLst>
           </p:cNvPr>
@@ -4968,7 +4968,7 @@
           <p:cNvPr id="14" name="">
             <a:extLst xmlns:a="http://schemas.openxmlformats.org/drawingml/2006/main">
               <a:ext uri="{FF2B5EF4-FFF2-40B4-BE49-F238E27FC236}">
-                <a16:creationId xmlns:a16="http://schemas.microsoft.com/office/drawing/2014/main" id="{418FF7F6-89E6-4BD3-B4CB-92827E4E0F0E}"/>
+                <a16:creationId xmlns:a16="http://schemas.microsoft.com/office/drawing/2014/main" id="{99279B30-E78F-47D1-9360-E5BBD6F3FBA5}"/>
               </a:ext>
             </a:extLst>
           </p:cNvPr>
@@ -5002,7 +5002,7 @@
           <p:cNvPr id="15" name="">
             <a:extLst xmlns:a="http://schemas.openxmlformats.org/drawingml/2006/main">
               <a:ext uri="{FF2B5EF4-FFF2-40B4-BE49-F238E27FC236}">
-                <a16:creationId xmlns:a16="http://schemas.microsoft.com/office/drawing/2014/main" id="{369D3BE9-81A1-4F90-9B1F-B090E79C479E}"/>
+                <a16:creationId xmlns:a16="http://schemas.microsoft.com/office/drawing/2014/main" id="{23FEA2A3-3C02-4CC9-9D39-2B140D1661A6}"/>
               </a:ext>
             </a:extLst>
           </p:cNvPr>
@@ -5034,7 +5034,7 @@
           <p:cNvPr id="16" name="">
             <a:extLst xmlns:a="http://schemas.openxmlformats.org/drawingml/2006/main">
               <a:ext uri="{FF2B5EF4-FFF2-40B4-BE49-F238E27FC236}">
-                <a16:creationId xmlns:a16="http://schemas.microsoft.com/office/drawing/2014/main" id="{B5A38755-AC88-4F2C-8245-1D34ADF56AFB}"/>
+                <a16:creationId xmlns:a16="http://schemas.microsoft.com/office/drawing/2014/main" id="{FEB7741C-80CE-4D4D-AF6A-2748956E20C5}"/>
               </a:ext>
             </a:extLst>
           </p:cNvPr>
@@ -5091,7 +5091,7 @@
           <p:cNvPr id="17" name="">
             <a:extLst xmlns:a="http://schemas.openxmlformats.org/drawingml/2006/main">
               <a:ext uri="{FF2B5EF4-FFF2-40B4-BE49-F238E27FC236}">
-                <a16:creationId xmlns:a16="http://schemas.microsoft.com/office/drawing/2014/main" id="{BBF74CEF-8867-4D54-BF24-C9BB6821393A}"/>
+                <a16:creationId xmlns:a16="http://schemas.microsoft.com/office/drawing/2014/main" id="{9A057D31-1646-4FE8-B651-44046F8EBB04}"/>
               </a:ext>
             </a:extLst>
           </p:cNvPr>
@@ -5148,7 +5148,7 @@
           <p:cNvPr id="18" name="">
             <a:extLst xmlns:a="http://schemas.openxmlformats.org/drawingml/2006/main">
               <a:ext uri="{FF2B5EF4-FFF2-40B4-BE49-F238E27FC236}">
-                <a16:creationId xmlns:a16="http://schemas.microsoft.com/office/drawing/2014/main" id="{127B43AA-284D-4E6D-A943-49DDA8D8F3DB}"/>
+                <a16:creationId xmlns:a16="http://schemas.microsoft.com/office/drawing/2014/main" id="{8281C79A-4C74-45B2-93A8-6F64E041EEC4}"/>
               </a:ext>
             </a:extLst>
           </p:cNvPr>
@@ -5182,7 +5182,7 @@
           <p:cNvPr id="19" name="">
             <a:extLst xmlns:a="http://schemas.openxmlformats.org/drawingml/2006/main">
               <a:ext uri="{FF2B5EF4-FFF2-40B4-BE49-F238E27FC236}">
-                <a16:creationId xmlns:a16="http://schemas.microsoft.com/office/drawing/2014/main" id="{9A31B9B6-F3C0-44BD-BC84-F23E87CFC1EC}"/>
+                <a16:creationId xmlns:a16="http://schemas.microsoft.com/office/drawing/2014/main" id="{68A5B0DE-D8E9-43AC-B1E4-DBB70C4E6BFB}"/>
               </a:ext>
             </a:extLst>
           </p:cNvPr>
@@ -5214,7 +5214,7 @@
           <p:cNvPr id="20" name="">
             <a:extLst xmlns:a="http://schemas.openxmlformats.org/drawingml/2006/main">
               <a:ext uri="{FF2B5EF4-FFF2-40B4-BE49-F238E27FC236}">
-                <a16:creationId xmlns:a16="http://schemas.microsoft.com/office/drawing/2014/main" id="{BB7419DF-DD9C-442B-9FA2-75997F5F0BDF}"/>
+                <a16:creationId xmlns:a16="http://schemas.microsoft.com/office/drawing/2014/main" id="{9CEDB519-C789-4CA2-89B7-F106CCBBB6A2}"/>
               </a:ext>
             </a:extLst>
           </p:cNvPr>
@@ -5271,7 +5271,7 @@
           <p:cNvPr id="21" name="">
             <a:extLst xmlns:a="http://schemas.openxmlformats.org/drawingml/2006/main">
               <a:ext uri="{FF2B5EF4-FFF2-40B4-BE49-F238E27FC236}">
-                <a16:creationId xmlns:a16="http://schemas.microsoft.com/office/drawing/2014/main" id="{1A392FB4-79D3-4F49-9D85-8C2FE0C7B4A8}"/>
+                <a16:creationId xmlns:a16="http://schemas.microsoft.com/office/drawing/2014/main" id="{16E3EFFA-04CC-4279-9A8C-1CA46A5186CC}"/>
               </a:ext>
             </a:extLst>
           </p:cNvPr>
@@ -5328,7 +5328,7 @@
           <p:cNvPr id="22" name="">
             <a:extLst xmlns:a="http://schemas.openxmlformats.org/drawingml/2006/main">
               <a:ext uri="{FF2B5EF4-FFF2-40B4-BE49-F238E27FC236}">
-                <a16:creationId xmlns:a16="http://schemas.microsoft.com/office/drawing/2014/main" id="{882489D2-B3A8-480B-B3DA-259A82049397}"/>
+                <a16:creationId xmlns:a16="http://schemas.microsoft.com/office/drawing/2014/main" id="{69B89699-F5CF-4EB3-BB54-EED1EDDDF6D5}"/>
               </a:ext>
             </a:extLst>
           </p:cNvPr>
@@ -5383,7 +5383,7 @@
     </p:spTree>
     <p:extLst>
       <p:ext uri="{BB962C8B-B14F-4D97-AF65-F5344CB8AC3E}">
-        <p14:creationId xmlns:p14="http://schemas.microsoft.com/office/powerpoint/2010/main" val="1969833190"/>
+        <p14:creationId xmlns:p14="http://schemas.microsoft.com/office/powerpoint/2010/main" val="1101394882"/>
       </p:ext>
     </p:extLst>
   </p:cSld>
@@ -5584,7 +5584,7 @@
           <p:cNvPr id="23" name="">
             <a:extLst xmlns:a="http://schemas.openxmlformats.org/drawingml/2006/main">
               <a:ext uri="{FF2B5EF4-FFF2-40B4-BE49-F238E27FC236}">
-                <a16:creationId xmlns:a16="http://schemas.microsoft.com/office/drawing/2014/main" id="{C9EFDEE3-AC8A-489A-ABCC-493FC403EEFD}"/>
+                <a16:creationId xmlns:a16="http://schemas.microsoft.com/office/drawing/2014/main" id="{1EB02551-7D86-409B-B82B-988601F2E033}"/>
               </a:ext>
             </a:extLst>
           </p:cNvPr>
@@ -5616,7 +5616,7 @@
           <p:cNvPr id="2" name="">
             <a:extLst xmlns:a="http://schemas.openxmlformats.org/drawingml/2006/main">
               <a:ext uri="{FF2B5EF4-FFF2-40B4-BE49-F238E27FC236}">
-                <a16:creationId xmlns:a16="http://schemas.microsoft.com/office/drawing/2014/main" id="{CB5F2D08-0CC2-4042-90E0-D427D0F3B45E}"/>
+                <a16:creationId xmlns:a16="http://schemas.microsoft.com/office/drawing/2014/main" id="{C7949F94-49C7-44B8-9F15-EB62D8BCF989}"/>
               </a:ext>
             </a:extLst>
           </p:cNvPr>
@@ -5673,7 +5673,7 @@
           <p:cNvPr id="3" name="">
             <a:extLst xmlns:a="http://schemas.openxmlformats.org/drawingml/2006/main">
               <a:ext uri="{FF2B5EF4-FFF2-40B4-BE49-F238E27FC236}">
-                <a16:creationId xmlns:a16="http://schemas.microsoft.com/office/drawing/2014/main" id="{BE4B99B7-79F0-4E02-9A5F-636511B3C8C9}"/>
+                <a16:creationId xmlns:a16="http://schemas.microsoft.com/office/drawing/2014/main" id="{69B0BE61-2F01-42E0-8742-BA794E247839}"/>
               </a:ext>
             </a:extLst>
           </p:cNvPr>
@@ -5705,7 +5705,7 @@
           <p:cNvPr id="4" name="">
             <a:extLst xmlns:a="http://schemas.openxmlformats.org/drawingml/2006/main">
               <a:ext uri="{FF2B5EF4-FFF2-40B4-BE49-F238E27FC236}">
-                <a16:creationId xmlns:a16="http://schemas.microsoft.com/office/drawing/2014/main" id="{9CA44A87-8A09-4C27-8B12-00E4313A26E1}"/>
+                <a16:creationId xmlns:a16="http://schemas.microsoft.com/office/drawing/2014/main" id="{5F73D81C-B58F-4B80-B888-EA64227139ED}"/>
               </a:ext>
             </a:extLst>
           </p:cNvPr>
@@ -5762,7 +5762,7 @@
           <p:cNvPr id="5" name="">
             <a:extLst xmlns:a="http://schemas.openxmlformats.org/drawingml/2006/main">
               <a:ext uri="{FF2B5EF4-FFF2-40B4-BE49-F238E27FC236}">
-                <a16:creationId xmlns:a16="http://schemas.microsoft.com/office/drawing/2014/main" id="{107563A9-0853-48E2-A0A3-AD7E188D6596}"/>
+                <a16:creationId xmlns:a16="http://schemas.microsoft.com/office/drawing/2014/main" id="{CFB81C0D-5F35-48EB-9828-CCB82C123A7F}"/>
               </a:ext>
             </a:extLst>
           </p:cNvPr>
@@ -5819,7 +5819,7 @@
           <p:cNvPr id="6" name="">
             <a:extLst xmlns:a="http://schemas.openxmlformats.org/drawingml/2006/main">
               <a:ext uri="{FF2B5EF4-FFF2-40B4-BE49-F238E27FC236}">
-                <a16:creationId xmlns:a16="http://schemas.microsoft.com/office/drawing/2014/main" id="{2D8056F4-CE66-4324-BE89-B03444236EB7}"/>
+                <a16:creationId xmlns:a16="http://schemas.microsoft.com/office/drawing/2014/main" id="{28E994B9-A7CB-4837-B927-B69BEA10ADF2}"/>
               </a:ext>
             </a:extLst>
           </p:cNvPr>
@@ -5876,7 +5876,7 @@
           <p:cNvPr id="7" name="">
             <a:extLst xmlns:a="http://schemas.openxmlformats.org/drawingml/2006/main">
               <a:ext uri="{FF2B5EF4-FFF2-40B4-BE49-F238E27FC236}">
-                <a16:creationId xmlns:a16="http://schemas.microsoft.com/office/drawing/2014/main" id="{2CC712B1-EDA4-4720-92DF-A78FE6B5A8B9}"/>
+                <a16:creationId xmlns:a16="http://schemas.microsoft.com/office/drawing/2014/main" id="{7D35F796-4727-44C7-8CC4-6DB2138B1800}"/>
               </a:ext>
             </a:extLst>
           </p:cNvPr>
@@ -5908,7 +5908,7 @@
           <p:cNvPr id="8" name="">
             <a:extLst xmlns:a="http://schemas.openxmlformats.org/drawingml/2006/main">
               <a:ext uri="{FF2B5EF4-FFF2-40B4-BE49-F238E27FC236}">
-                <a16:creationId xmlns:a16="http://schemas.microsoft.com/office/drawing/2014/main" id="{275E9118-6C51-4399-9099-3E453E2620FD}"/>
+                <a16:creationId xmlns:a16="http://schemas.microsoft.com/office/drawing/2014/main" id="{06DB4A46-D604-4A07-92BB-45DD6F59E92C}"/>
               </a:ext>
             </a:extLst>
           </p:cNvPr>
@@ -5965,7 +5965,7 @@
           <p:cNvPr id="9" name="">
             <a:extLst xmlns:a="http://schemas.openxmlformats.org/drawingml/2006/main">
               <a:ext uri="{FF2B5EF4-FFF2-40B4-BE49-F238E27FC236}">
-                <a16:creationId xmlns:a16="http://schemas.microsoft.com/office/drawing/2014/main" id="{26391A33-EC1C-4401-B066-D2951B454A6D}"/>
+                <a16:creationId xmlns:a16="http://schemas.microsoft.com/office/drawing/2014/main" id="{687CC590-4721-4A01-906D-A1390E6FB784}"/>
               </a:ext>
             </a:extLst>
           </p:cNvPr>
@@ -6022,7 +6022,7 @@
           <p:cNvPr id="10" name="">
             <a:extLst xmlns:a="http://schemas.openxmlformats.org/drawingml/2006/main">
               <a:ext uri="{FF2B5EF4-FFF2-40B4-BE49-F238E27FC236}">
-                <a16:creationId xmlns:a16="http://schemas.microsoft.com/office/drawing/2014/main" id="{E4114091-6B37-4787-AE87-F5C4B08C1017}"/>
+                <a16:creationId xmlns:a16="http://schemas.microsoft.com/office/drawing/2014/main" id="{4CADA382-8A65-468F-B733-53BCC8E9D525}"/>
               </a:ext>
             </a:extLst>
           </p:cNvPr>
@@ -6056,7 +6056,7 @@
           <p:cNvPr id="11" name="">
             <a:extLst xmlns:a="http://schemas.openxmlformats.org/drawingml/2006/main">
               <a:ext uri="{FF2B5EF4-FFF2-40B4-BE49-F238E27FC236}">
-                <a16:creationId xmlns:a16="http://schemas.microsoft.com/office/drawing/2014/main" id="{77319402-0F61-4CC5-86FE-B2C17FC6E131}"/>
+                <a16:creationId xmlns:a16="http://schemas.microsoft.com/office/drawing/2014/main" id="{09B95921-9749-405B-B3B8-2AB4EF2A8AB3}"/>
               </a:ext>
             </a:extLst>
           </p:cNvPr>
@@ -6088,7 +6088,7 @@
           <p:cNvPr id="12" name="">
             <a:extLst xmlns:a="http://schemas.openxmlformats.org/drawingml/2006/main">
               <a:ext uri="{FF2B5EF4-FFF2-40B4-BE49-F238E27FC236}">
-                <a16:creationId xmlns:a16="http://schemas.microsoft.com/office/drawing/2014/main" id="{35B6CD80-BC54-4E07-A4ED-CFFB1D143746}"/>
+                <a16:creationId xmlns:a16="http://schemas.microsoft.com/office/drawing/2014/main" id="{9E6663FE-B4D9-467B-AEEA-D2CF719FCAB5}"/>
               </a:ext>
             </a:extLst>
           </p:cNvPr>
@@ -6145,7 +6145,7 @@
           <p:cNvPr id="13" name="">
             <a:extLst xmlns:a="http://schemas.openxmlformats.org/drawingml/2006/main">
               <a:ext uri="{FF2B5EF4-FFF2-40B4-BE49-F238E27FC236}">
-                <a16:creationId xmlns:a16="http://schemas.microsoft.com/office/drawing/2014/main" id="{07291A15-933D-4B57-96F5-09565E442D6A}"/>
+                <a16:creationId xmlns:a16="http://schemas.microsoft.com/office/drawing/2014/main" id="{72567894-9E3D-421D-A76E-AE17A42D8C99}"/>
               </a:ext>
             </a:extLst>
           </p:cNvPr>
@@ -6202,7 +6202,7 @@
           <p:cNvPr id="14" name="">
             <a:extLst xmlns:a="http://schemas.openxmlformats.org/drawingml/2006/main">
               <a:ext uri="{FF2B5EF4-FFF2-40B4-BE49-F238E27FC236}">
-                <a16:creationId xmlns:a16="http://schemas.microsoft.com/office/drawing/2014/main" id="{9A2907B2-9856-428E-99A1-D0BB180E5643}"/>
+                <a16:creationId xmlns:a16="http://schemas.microsoft.com/office/drawing/2014/main" id="{401599FB-C3B1-4030-B4E3-1AD49EEF6DDD}"/>
               </a:ext>
             </a:extLst>
           </p:cNvPr>
@@ -6236,7 +6236,7 @@
           <p:cNvPr id="15" name="">
             <a:extLst xmlns:a="http://schemas.openxmlformats.org/drawingml/2006/main">
               <a:ext uri="{FF2B5EF4-FFF2-40B4-BE49-F238E27FC236}">
-                <a16:creationId xmlns:a16="http://schemas.microsoft.com/office/drawing/2014/main" id="{5164FFF8-FA05-42F0-8A2F-7BB0C1A3AFE2}"/>
+                <a16:creationId xmlns:a16="http://schemas.microsoft.com/office/drawing/2014/main" id="{944227EB-59C5-451E-A8B6-EFBBA008FBD8}"/>
               </a:ext>
             </a:extLst>
           </p:cNvPr>
@@ -6268,7 +6268,7 @@
           <p:cNvPr id="16" name="">
             <a:extLst xmlns:a="http://schemas.openxmlformats.org/drawingml/2006/main">
               <a:ext uri="{FF2B5EF4-FFF2-40B4-BE49-F238E27FC236}">
-                <a16:creationId xmlns:a16="http://schemas.microsoft.com/office/drawing/2014/main" id="{F071E52C-5B7C-4324-B472-22415D0ECCD0}"/>
+                <a16:creationId xmlns:a16="http://schemas.microsoft.com/office/drawing/2014/main" id="{69A543D7-0797-4D0E-BE78-49FB1EBD0611}"/>
               </a:ext>
             </a:extLst>
           </p:cNvPr>
@@ -6325,7 +6325,7 @@
           <p:cNvPr id="17" name="">
             <a:extLst xmlns:a="http://schemas.openxmlformats.org/drawingml/2006/main">
               <a:ext uri="{FF2B5EF4-FFF2-40B4-BE49-F238E27FC236}">
-                <a16:creationId xmlns:a16="http://schemas.microsoft.com/office/drawing/2014/main" id="{C878B547-6BE6-4317-B2DC-863A23F03CFC}"/>
+                <a16:creationId xmlns:a16="http://schemas.microsoft.com/office/drawing/2014/main" id="{833215B7-0B6B-4630-BD10-07471678C29B}"/>
               </a:ext>
             </a:extLst>
           </p:cNvPr>
@@ -6382,7 +6382,7 @@
           <p:cNvPr id="18" name="">
             <a:extLst xmlns:a="http://schemas.openxmlformats.org/drawingml/2006/main">
               <a:ext uri="{FF2B5EF4-FFF2-40B4-BE49-F238E27FC236}">
-                <a16:creationId xmlns:a16="http://schemas.microsoft.com/office/drawing/2014/main" id="{AEEC7CE4-A158-44E4-8514-5863BFF7A8BA}"/>
+                <a16:creationId xmlns:a16="http://schemas.microsoft.com/office/drawing/2014/main" id="{E190F374-7087-4B59-BA48-B6E308AE190F}"/>
               </a:ext>
             </a:extLst>
           </p:cNvPr>
@@ -6416,7 +6416,7 @@
           <p:cNvPr id="19" name="">
             <a:extLst xmlns:a="http://schemas.openxmlformats.org/drawingml/2006/main">
               <a:ext uri="{FF2B5EF4-FFF2-40B4-BE49-F238E27FC236}">
-                <a16:creationId xmlns:a16="http://schemas.microsoft.com/office/drawing/2014/main" id="{FC7B6E82-7592-41E2-A215-8BDFCB80EFF6}"/>
+                <a16:creationId xmlns:a16="http://schemas.microsoft.com/office/drawing/2014/main" id="{42F6D2EB-938C-4F72-86D6-5F566F223EDC}"/>
               </a:ext>
             </a:extLst>
           </p:cNvPr>
@@ -6448,7 +6448,7 @@
           <p:cNvPr id="20" name="">
             <a:extLst xmlns:a="http://schemas.openxmlformats.org/drawingml/2006/main">
               <a:ext uri="{FF2B5EF4-FFF2-40B4-BE49-F238E27FC236}">
-                <a16:creationId xmlns:a16="http://schemas.microsoft.com/office/drawing/2014/main" id="{48466BFE-79FC-4533-A055-33E782206FD2}"/>
+                <a16:creationId xmlns:a16="http://schemas.microsoft.com/office/drawing/2014/main" id="{BCC725A0-3EA9-4AEB-86D8-C676CA3D5E09}"/>
               </a:ext>
             </a:extLst>
           </p:cNvPr>
@@ -6505,7 +6505,7 @@
           <p:cNvPr id="21" name="">
             <a:extLst xmlns:a="http://schemas.openxmlformats.org/drawingml/2006/main">
               <a:ext uri="{FF2B5EF4-FFF2-40B4-BE49-F238E27FC236}">
-                <a16:creationId xmlns:a16="http://schemas.microsoft.com/office/drawing/2014/main" id="{4E404286-B92C-4769-BD9A-92BB9CAB75B6}"/>
+                <a16:creationId xmlns:a16="http://schemas.microsoft.com/office/drawing/2014/main" id="{3C1DDA58-7C44-4A7F-AE9F-97A601056470}"/>
               </a:ext>
             </a:extLst>
           </p:cNvPr>
@@ -6562,7 +6562,7 @@
           <p:cNvPr id="22" name="">
             <a:extLst xmlns:a="http://schemas.openxmlformats.org/drawingml/2006/main">
               <a:ext uri="{FF2B5EF4-FFF2-40B4-BE49-F238E27FC236}">
-                <a16:creationId xmlns:a16="http://schemas.microsoft.com/office/drawing/2014/main" id="{93652144-DA16-4470-B55C-053FFA9B2E1A}"/>
+                <a16:creationId xmlns:a16="http://schemas.microsoft.com/office/drawing/2014/main" id="{8FCA5975-CC09-413E-B5C7-E287A299CF0F}"/>
               </a:ext>
             </a:extLst>
           </p:cNvPr>
@@ -6617,7 +6617,7 @@
     </p:spTree>
     <p:extLst>
       <p:ext uri="{BB962C8B-B14F-4D97-AF65-F5344CB8AC3E}">
-        <p14:creationId xmlns:p14="http://schemas.microsoft.com/office/powerpoint/2010/main" val="172037495"/>
+        <p14:creationId xmlns:p14="http://schemas.microsoft.com/office/powerpoint/2010/main" val="1266664348"/>
       </p:ext>
     </p:extLst>
   </p:cSld>
@@ -6818,7 +6818,7 @@
           <p:cNvPr id="16" name="">
             <a:extLst xmlns:a="http://schemas.openxmlformats.org/drawingml/2006/main">
               <a:ext uri="{FF2B5EF4-FFF2-40B4-BE49-F238E27FC236}">
-                <a16:creationId xmlns:a16="http://schemas.microsoft.com/office/drawing/2014/main" id="{F1D5E66D-9C5F-4DB8-9EE3-BCBCCDF8AD0F}"/>
+                <a16:creationId xmlns:a16="http://schemas.microsoft.com/office/drawing/2014/main" id="{D1F41FB6-EF73-44E8-8C46-2789603DFC5A}"/>
               </a:ext>
             </a:extLst>
           </p:cNvPr>
@@ -6850,7 +6850,7 @@
           <p:cNvPr id="2" name="">
             <a:extLst xmlns:a="http://schemas.openxmlformats.org/drawingml/2006/main">
               <a:ext uri="{FF2B5EF4-FFF2-40B4-BE49-F238E27FC236}">
-                <a16:creationId xmlns:a16="http://schemas.microsoft.com/office/drawing/2014/main" id="{FD6547DC-0C95-415F-930D-194F7039B56C}"/>
+                <a16:creationId xmlns:a16="http://schemas.microsoft.com/office/drawing/2014/main" id="{AC09242F-3276-4FFA-8F42-A4426E1AF018}"/>
               </a:ext>
             </a:extLst>
           </p:cNvPr>
@@ -6907,7 +6907,7 @@
           <p:cNvPr id="3" name="">
             <a:extLst xmlns:a="http://schemas.openxmlformats.org/drawingml/2006/main">
               <a:ext uri="{FF2B5EF4-FFF2-40B4-BE49-F238E27FC236}">
-                <a16:creationId xmlns:a16="http://schemas.microsoft.com/office/drawing/2014/main" id="{D724F178-9701-47B5-B5D8-30397A9A7161}"/>
+                <a16:creationId xmlns:a16="http://schemas.microsoft.com/office/drawing/2014/main" id="{E09B9321-4DAA-4266-8D00-E75E41C4738B}"/>
               </a:ext>
             </a:extLst>
           </p:cNvPr>
@@ -6939,7 +6939,7 @@
           <p:cNvPr id="4" name="">
             <a:extLst xmlns:a="http://schemas.openxmlformats.org/drawingml/2006/main">
               <a:ext uri="{FF2B5EF4-FFF2-40B4-BE49-F238E27FC236}">
-                <a16:creationId xmlns:a16="http://schemas.microsoft.com/office/drawing/2014/main" id="{8F229573-C5FE-4350-A034-DAAAEB657331}"/>
+                <a16:creationId xmlns:a16="http://schemas.microsoft.com/office/drawing/2014/main" id="{31F8E7BB-B2D5-401C-9C52-97A2AD15B29D}"/>
               </a:ext>
             </a:extLst>
           </p:cNvPr>
@@ -6996,7 +6996,7 @@
           <p:cNvPr id="5" name="">
             <a:extLst xmlns:a="http://schemas.openxmlformats.org/drawingml/2006/main">
               <a:ext uri="{FF2B5EF4-FFF2-40B4-BE49-F238E27FC236}">
-                <a16:creationId xmlns:a16="http://schemas.microsoft.com/office/drawing/2014/main" id="{DF06074F-7DD6-40B0-9A85-6496C4E53CAF}"/>
+                <a16:creationId xmlns:a16="http://schemas.microsoft.com/office/drawing/2014/main" id="{5CBC57C1-4C28-462B-8FFB-AC67E43B0983}"/>
               </a:ext>
             </a:extLst>
           </p:cNvPr>
@@ -7053,7 +7053,7 @@
           <p:cNvPr id="6" name="">
             <a:extLst xmlns:a="http://schemas.openxmlformats.org/drawingml/2006/main">
               <a:ext uri="{FF2B5EF4-FFF2-40B4-BE49-F238E27FC236}">
-                <a16:creationId xmlns:a16="http://schemas.microsoft.com/office/drawing/2014/main" id="{27F99284-76E8-4345-8840-51EA477C7752}"/>
+                <a16:creationId xmlns:a16="http://schemas.microsoft.com/office/drawing/2014/main" id="{9E0D6381-F3EC-44FC-B04A-55BA5BE3B21C}"/>
               </a:ext>
             </a:extLst>
           </p:cNvPr>
@@ -7110,7 +7110,7 @@
           <p:cNvPr id="7" name="">
             <a:extLst xmlns:a="http://schemas.openxmlformats.org/drawingml/2006/main">
               <a:ext uri="{FF2B5EF4-FFF2-40B4-BE49-F238E27FC236}">
-                <a16:creationId xmlns:a16="http://schemas.microsoft.com/office/drawing/2014/main" id="{5CFE49FA-EC82-42A2-AF43-9054F0054672}"/>
+                <a16:creationId xmlns:a16="http://schemas.microsoft.com/office/drawing/2014/main" id="{61DDE529-9B61-4F7D-B0B5-567ECB90863B}"/>
               </a:ext>
             </a:extLst>
           </p:cNvPr>
@@ -7142,7 +7142,7 @@
           <p:cNvPr id="8" name="">
             <a:extLst xmlns:a="http://schemas.openxmlformats.org/drawingml/2006/main">
               <a:ext uri="{FF2B5EF4-FFF2-40B4-BE49-F238E27FC236}">
-                <a16:creationId xmlns:a16="http://schemas.microsoft.com/office/drawing/2014/main" id="{6BB03BDD-349D-48F6-9ED7-4DE1090380B1}"/>
+                <a16:creationId xmlns:a16="http://schemas.microsoft.com/office/drawing/2014/main" id="{C7D1EDA7-CB24-474E-A449-6B92F5843F54}"/>
               </a:ext>
             </a:extLst>
           </p:cNvPr>
@@ -7199,7 +7199,7 @@
           <p:cNvPr id="9" name="">
             <a:extLst xmlns:a="http://schemas.openxmlformats.org/drawingml/2006/main">
               <a:ext uri="{FF2B5EF4-FFF2-40B4-BE49-F238E27FC236}">
-                <a16:creationId xmlns:a16="http://schemas.microsoft.com/office/drawing/2014/main" id="{EE1A1D6E-86A6-43A0-A54D-D5F10B969B5B}"/>
+                <a16:creationId xmlns:a16="http://schemas.microsoft.com/office/drawing/2014/main" id="{A96A4279-4091-469A-8EB4-C441109A18ED}"/>
               </a:ext>
             </a:extLst>
           </p:cNvPr>
@@ -7256,7 +7256,7 @@
           <p:cNvPr id="10" name="">
             <a:extLst xmlns:a="http://schemas.openxmlformats.org/drawingml/2006/main">
               <a:ext uri="{FF2B5EF4-FFF2-40B4-BE49-F238E27FC236}">
-                <a16:creationId xmlns:a16="http://schemas.microsoft.com/office/drawing/2014/main" id="{254476B9-FD66-4EBD-A140-2B44117765DD}"/>
+                <a16:creationId xmlns:a16="http://schemas.microsoft.com/office/drawing/2014/main" id="{CCD5023F-48C2-45E5-8ABF-D1D641285790}"/>
               </a:ext>
             </a:extLst>
           </p:cNvPr>
@@ -7313,7 +7313,7 @@
           <p:cNvPr id="11" name="">
             <a:extLst xmlns:a="http://schemas.openxmlformats.org/drawingml/2006/main">
               <a:ext uri="{FF2B5EF4-FFF2-40B4-BE49-F238E27FC236}">
-                <a16:creationId xmlns:a16="http://schemas.microsoft.com/office/drawing/2014/main" id="{81C999AB-113B-4782-BE31-C9CC2A74135F}"/>
+                <a16:creationId xmlns:a16="http://schemas.microsoft.com/office/drawing/2014/main" id="{8567F736-E647-4C85-99B9-4F779E9E3E55}"/>
               </a:ext>
             </a:extLst>
           </p:cNvPr>
@@ -7345,7 +7345,7 @@
           <p:cNvPr id="12" name="">
             <a:extLst xmlns:a="http://schemas.openxmlformats.org/drawingml/2006/main">
               <a:ext uri="{FF2B5EF4-FFF2-40B4-BE49-F238E27FC236}">
-                <a16:creationId xmlns:a16="http://schemas.microsoft.com/office/drawing/2014/main" id="{36C56E23-B980-4A35-8918-E34E539D1249}"/>
+                <a16:creationId xmlns:a16="http://schemas.microsoft.com/office/drawing/2014/main" id="{C26D9CE8-25AE-4A5F-AC74-4D3D030C7C98}"/>
               </a:ext>
             </a:extLst>
           </p:cNvPr>
@@ -7402,7 +7402,7 @@
           <p:cNvPr id="13" name="">
             <a:extLst xmlns:a="http://schemas.openxmlformats.org/drawingml/2006/main">
               <a:ext uri="{FF2B5EF4-FFF2-40B4-BE49-F238E27FC236}">
-                <a16:creationId xmlns:a16="http://schemas.microsoft.com/office/drawing/2014/main" id="{3F3645D6-B22C-44BD-AECA-FBA664366D8E}"/>
+                <a16:creationId xmlns:a16="http://schemas.microsoft.com/office/drawing/2014/main" id="{31F228C7-1E31-49DC-A0F8-89B9FB2D04AA}"/>
               </a:ext>
             </a:extLst>
           </p:cNvPr>
@@ -7459,7 +7459,7 @@
           <p:cNvPr id="14" name="">
             <a:extLst xmlns:a="http://schemas.openxmlformats.org/drawingml/2006/main">
               <a:ext uri="{FF2B5EF4-FFF2-40B4-BE49-F238E27FC236}">
-                <a16:creationId xmlns:a16="http://schemas.microsoft.com/office/drawing/2014/main" id="{30E7039D-17DB-4D3A-B4CF-DA09A58B3201}"/>
+                <a16:creationId xmlns:a16="http://schemas.microsoft.com/office/drawing/2014/main" id="{011174BF-73C7-4E62-9596-515100E2BEF0}"/>
               </a:ext>
             </a:extLst>
           </p:cNvPr>
@@ -7516,7 +7516,7 @@
           <p:cNvPr id="15" name="">
             <a:extLst xmlns:a="http://schemas.openxmlformats.org/drawingml/2006/main">
               <a:ext uri="{FF2B5EF4-FFF2-40B4-BE49-F238E27FC236}">
-                <a16:creationId xmlns:a16="http://schemas.microsoft.com/office/drawing/2014/main" id="{63AE0461-8DDC-41EE-BAA5-A81D94F8743E}"/>
+                <a16:creationId xmlns:a16="http://schemas.microsoft.com/office/drawing/2014/main" id="{C3B714F6-43C1-4C9F-A430-C087A3BC0451}"/>
               </a:ext>
             </a:extLst>
           </p:cNvPr>
@@ -7571,7 +7571,7 @@
     </p:spTree>
     <p:extLst>
       <p:ext uri="{BB962C8B-B14F-4D97-AF65-F5344CB8AC3E}">
-        <p14:creationId xmlns:p14="http://schemas.microsoft.com/office/powerpoint/2010/main" val="428458347"/>
+        <p14:creationId xmlns:p14="http://schemas.microsoft.com/office/powerpoint/2010/main" val="811261620"/>
       </p:ext>
     </p:extLst>
   </p:cSld>
@@ -7772,7 +7772,7 @@
           <p:cNvPr id="23" name="">
             <a:extLst xmlns:a="http://schemas.openxmlformats.org/drawingml/2006/main">
               <a:ext uri="{FF2B5EF4-FFF2-40B4-BE49-F238E27FC236}">
-                <a16:creationId xmlns:a16="http://schemas.microsoft.com/office/drawing/2014/main" id="{AA262907-9426-4746-A70D-AF08A5EC2E22}"/>
+                <a16:creationId xmlns:a16="http://schemas.microsoft.com/office/drawing/2014/main" id="{69412AE2-158C-43BB-B998-7743084EB6D8}"/>
               </a:ext>
             </a:extLst>
           </p:cNvPr>
@@ -7804,7 +7804,7 @@
           <p:cNvPr id="2" name="">
             <a:extLst xmlns:a="http://schemas.openxmlformats.org/drawingml/2006/main">
               <a:ext uri="{FF2B5EF4-FFF2-40B4-BE49-F238E27FC236}">
-                <a16:creationId xmlns:a16="http://schemas.microsoft.com/office/drawing/2014/main" id="{5009145F-2682-48DD-9C19-81E97F814FDE}"/>
+                <a16:creationId xmlns:a16="http://schemas.microsoft.com/office/drawing/2014/main" id="{30E76BA0-8BD0-45D1-96CF-8325B620F335}"/>
               </a:ext>
             </a:extLst>
           </p:cNvPr>
@@ -7861,7 +7861,7 @@
           <p:cNvPr id="3" name="">
             <a:extLst xmlns:a="http://schemas.openxmlformats.org/drawingml/2006/main">
               <a:ext uri="{FF2B5EF4-FFF2-40B4-BE49-F238E27FC236}">
-                <a16:creationId xmlns:a16="http://schemas.microsoft.com/office/drawing/2014/main" id="{D096F169-681B-4EE3-8FDD-36F5E5AB7A0E}"/>
+                <a16:creationId xmlns:a16="http://schemas.microsoft.com/office/drawing/2014/main" id="{E98EDEC8-AAE8-475D-9378-0465A421350B}"/>
               </a:ext>
             </a:extLst>
           </p:cNvPr>
@@ -7893,7 +7893,7 @@
           <p:cNvPr id="4" name="">
             <a:extLst xmlns:a="http://schemas.openxmlformats.org/drawingml/2006/main">
               <a:ext uri="{FF2B5EF4-FFF2-40B4-BE49-F238E27FC236}">
-                <a16:creationId xmlns:a16="http://schemas.microsoft.com/office/drawing/2014/main" id="{CDB47E58-C998-48AE-ABA3-E5022ED36645}"/>
+                <a16:creationId xmlns:a16="http://schemas.microsoft.com/office/drawing/2014/main" id="{80183449-04FA-445D-892D-8299B98E1E17}"/>
               </a:ext>
             </a:extLst>
           </p:cNvPr>
@@ -7950,7 +7950,7 @@
           <p:cNvPr id="5" name="">
             <a:extLst xmlns:a="http://schemas.openxmlformats.org/drawingml/2006/main">
               <a:ext uri="{FF2B5EF4-FFF2-40B4-BE49-F238E27FC236}">
-                <a16:creationId xmlns:a16="http://schemas.microsoft.com/office/drawing/2014/main" id="{9996FAE3-513D-4894-AB45-D0D5E070D5D4}"/>
+                <a16:creationId xmlns:a16="http://schemas.microsoft.com/office/drawing/2014/main" id="{4DF03934-A95E-4DAB-B5B4-4FD5131CB2E7}"/>
               </a:ext>
             </a:extLst>
           </p:cNvPr>
@@ -8007,7 +8007,7 @@
           <p:cNvPr id="6" name="">
             <a:extLst xmlns:a="http://schemas.openxmlformats.org/drawingml/2006/main">
               <a:ext uri="{FF2B5EF4-FFF2-40B4-BE49-F238E27FC236}">
-                <a16:creationId xmlns:a16="http://schemas.microsoft.com/office/drawing/2014/main" id="{2B03B7C4-7B10-4B6E-AA1D-9D51D301A656}"/>
+                <a16:creationId xmlns:a16="http://schemas.microsoft.com/office/drawing/2014/main" id="{E77935CB-9655-4D37-B61E-2CDF4D33D72B}"/>
               </a:ext>
             </a:extLst>
           </p:cNvPr>
@@ -8064,7 +8064,7 @@
           <p:cNvPr id="7" name="">
             <a:extLst xmlns:a="http://schemas.openxmlformats.org/drawingml/2006/main">
               <a:ext uri="{FF2B5EF4-FFF2-40B4-BE49-F238E27FC236}">
-                <a16:creationId xmlns:a16="http://schemas.microsoft.com/office/drawing/2014/main" id="{3B70AC52-2EB5-4EE2-945C-3E35282D3AF5}"/>
+                <a16:creationId xmlns:a16="http://schemas.microsoft.com/office/drawing/2014/main" id="{6D698D60-E545-42C5-AD60-FA18D0777981}"/>
               </a:ext>
             </a:extLst>
           </p:cNvPr>
@@ -8096,7 +8096,7 @@
           <p:cNvPr id="8" name="">
             <a:extLst xmlns:a="http://schemas.openxmlformats.org/drawingml/2006/main">
               <a:ext uri="{FF2B5EF4-FFF2-40B4-BE49-F238E27FC236}">
-                <a16:creationId xmlns:a16="http://schemas.microsoft.com/office/drawing/2014/main" id="{854087FD-247B-4A3C-8D72-4EB352FC0A74}"/>
+                <a16:creationId xmlns:a16="http://schemas.microsoft.com/office/drawing/2014/main" id="{2AA84DAE-27B7-410C-B6B1-901242DC5D64}"/>
               </a:ext>
             </a:extLst>
           </p:cNvPr>
@@ -8153,7 +8153,7 @@
           <p:cNvPr id="9" name="">
             <a:extLst xmlns:a="http://schemas.openxmlformats.org/drawingml/2006/main">
               <a:ext uri="{FF2B5EF4-FFF2-40B4-BE49-F238E27FC236}">
-                <a16:creationId xmlns:a16="http://schemas.microsoft.com/office/drawing/2014/main" id="{5F698139-5D7F-4D02-A12F-1421C14DAF2E}"/>
+                <a16:creationId xmlns:a16="http://schemas.microsoft.com/office/drawing/2014/main" id="{F340BF2E-0C71-4D8A-AF7C-A617CB7CA1C4}"/>
               </a:ext>
             </a:extLst>
           </p:cNvPr>
@@ -8210,19 +8210,19 @@
           <p:cNvPr id="10" name="">
             <a:extLst xmlns:a="http://schemas.openxmlformats.org/drawingml/2006/main">
               <a:ext uri="{FF2B5EF4-FFF2-40B4-BE49-F238E27FC236}">
-                <a16:creationId xmlns:a16="http://schemas.microsoft.com/office/drawing/2014/main" id="{B404C1DF-8603-4621-B3F0-A07BE8F29B81}"/>
-              </a:ext>
-            </a:extLst>
-          </p:cNvPr>
-          <p:cNvSpPr>
-            <a:spLocks xmlns:a="http://schemas.openxmlformats.org/drawingml/2006/main" noGrp="1"/>
-          </p:cNvSpPr>
-          <p:nvPr/>
-        </p:nvSpPr>
-        <p:spPr>
-          <a:xfrm xmlns:a="http://schemas.openxmlformats.org/drawingml/2006/main">
-            <a:off x="914400" y="1257300"/>
-            <a:ext cx="10363200" cy="781050"/>
+                <a16:creationId xmlns:a16="http://schemas.microsoft.com/office/drawing/2014/main" id="{95F960BE-7708-4075-AF68-B0E60F2B0494}"/>
+              </a:ext>
+            </a:extLst>
+          </p:cNvPr>
+          <p:cNvSpPr>
+            <a:spLocks xmlns:a="http://schemas.openxmlformats.org/drawingml/2006/main" noGrp="1"/>
+          </p:cNvSpPr>
+          <p:nvPr/>
+        </p:nvSpPr>
+        <p:spPr>
+          <a:xfrm xmlns:a="http://schemas.openxmlformats.org/drawingml/2006/main">
+            <a:off x="857250" y="1219200"/>
+            <a:ext cx="10477500" cy="742950"/>
           </a:xfrm>
           <a:prstGeom xmlns:a="http://schemas.openxmlformats.org/drawingml/2006/main" prst="rect">
             <a:avLst/>
@@ -8239,7 +8239,7 @@
           <a:lstStyle xmlns:a="http://schemas.openxmlformats.org/drawingml/2006/main"/>
           <a:p xmlns:a="http://schemas.openxmlformats.org/drawingml/2006/main">
             <a:pPr algn="ctr">
-              <a:defRPr sz="2175" b="1">
+              <a:defRPr sz="2100" b="1">
                 <a:solidFill>
                   <a:srgbClr val="17253A"/>
                 </a:solidFill>
@@ -8249,7 +8249,7 @@
               </a:defRPr>
             </a:pPr>
             <a:r>
-              <a:rPr sz="2175" b="1">
+              <a:rPr sz="2100" b="1">
                 <a:solidFill>
                   <a:srgbClr val="17253A"/>
                 </a:solidFill>
@@ -8267,28 +8267,30 @@
           <p:cNvPr id="11" name="">
             <a:extLst xmlns:a="http://schemas.openxmlformats.org/drawingml/2006/main">
               <a:ext uri="{FF2B5EF4-FFF2-40B4-BE49-F238E27FC236}">
-                <a16:creationId xmlns:a16="http://schemas.microsoft.com/office/drawing/2014/main" id="{96E9F0D9-65AD-447F-9E28-35900CC0EFA5}"/>
-              </a:ext>
-            </a:extLst>
-          </p:cNvPr>
-          <p:cNvSpPr>
-            <a:spLocks xmlns:a="http://schemas.openxmlformats.org/drawingml/2006/main" noGrp="1"/>
-          </p:cNvSpPr>
-          <p:nvPr/>
-        </p:nvSpPr>
-        <p:spPr>
-          <a:xfrm xmlns:a="http://schemas.openxmlformats.org/drawingml/2006/main">
-            <a:off x="1000125" y="2247900"/>
-            <a:ext cx="476250" cy="476250"/>
-          </a:xfrm>
-          <a:prstGeom xmlns:a="http://schemas.openxmlformats.org/drawingml/2006/main" prst="ellipse">
+                <a16:creationId xmlns:a16="http://schemas.microsoft.com/office/drawing/2014/main" id="{C011683B-F295-46AA-844E-28B38C7ED97C}"/>
+              </a:ext>
+            </a:extLst>
+          </p:cNvPr>
+          <p:cNvSpPr>
+            <a:spLocks xmlns:a="http://schemas.openxmlformats.org/drawingml/2006/main" noGrp="1"/>
+          </p:cNvSpPr>
+          <p:nvPr/>
+        </p:nvSpPr>
+        <p:spPr>
+          <a:xfrm xmlns:a="http://schemas.openxmlformats.org/drawingml/2006/main">
+            <a:off x="971550" y="2124075"/>
+            <a:ext cx="38100" cy="3524250"/>
+          </a:xfrm>
+          <a:prstGeom xmlns:a="http://schemas.openxmlformats.org/drawingml/2006/main" prst="rect">
             <a:avLst/>
           </a:prstGeom>
           <a:solidFill xmlns:a="http://schemas.openxmlformats.org/drawingml/2006/main">
-            <a:srgbClr val="18324A"/>
+            <a:srgbClr val="2C6E73"/>
           </a:solidFill>
           <a:ln xmlns:a="http://schemas.openxmlformats.org/drawingml/2006/main" w="0">
-            <a:noFill/>
+            <a:solidFill>
+              <a:srgbClr val="2C6E73"/>
+            </a:solidFill>
           </a:ln>
         </p:spPr>
       </p:sp>
@@ -8297,19 +8299,19 @@
           <p:cNvPr id="12" name="">
             <a:extLst xmlns:a="http://schemas.openxmlformats.org/drawingml/2006/main">
               <a:ext uri="{FF2B5EF4-FFF2-40B4-BE49-F238E27FC236}">
-                <a16:creationId xmlns:a16="http://schemas.microsoft.com/office/drawing/2014/main" id="{683E7F6C-C813-4790-A8AB-1CB25F42D217}"/>
-              </a:ext>
-            </a:extLst>
-          </p:cNvPr>
-          <p:cNvSpPr>
-            <a:spLocks xmlns:a="http://schemas.openxmlformats.org/drawingml/2006/main" noGrp="1"/>
-          </p:cNvSpPr>
-          <p:nvPr/>
-        </p:nvSpPr>
-        <p:spPr>
-          <a:xfrm xmlns:a="http://schemas.openxmlformats.org/drawingml/2006/main">
-            <a:off x="1000125" y="2276475"/>
-            <a:ext cx="476250" cy="419100"/>
+                <a16:creationId xmlns:a16="http://schemas.microsoft.com/office/drawing/2014/main" id="{A50C9281-973A-4DCE-B77D-3EFEF2A0B3F3}"/>
+              </a:ext>
+            </a:extLst>
+          </p:cNvPr>
+          <p:cNvSpPr>
+            <a:spLocks xmlns:a="http://schemas.openxmlformats.org/drawingml/2006/main" noGrp="1"/>
+          </p:cNvSpPr>
+          <p:nvPr/>
+        </p:nvSpPr>
+        <p:spPr>
+          <a:xfrm xmlns:a="http://schemas.openxmlformats.org/drawingml/2006/main">
+            <a:off x="1162050" y="2200275"/>
+            <a:ext cx="400050" cy="400050"/>
           </a:xfrm>
           <a:prstGeom xmlns:a="http://schemas.openxmlformats.org/drawingml/2006/main" prst="rect">
             <a:avLst/>
@@ -8326,9 +8328,9 @@
           <a:lstStyle xmlns:a="http://schemas.openxmlformats.org/drawingml/2006/main"/>
           <a:p xmlns:a="http://schemas.openxmlformats.org/drawingml/2006/main">
             <a:pPr algn="ctr">
-              <a:defRPr sz="1350" b="1">
-                <a:solidFill>
-                  <a:srgbClr val="FFFFFF"/>
+              <a:defRPr sz="1125" b="1">
+                <a:solidFill>
+                  <a:srgbClr val="2C6E73"/>
                 </a:solidFill>
                 <a:latin typeface="Arial"/>
                 <a:ea typeface="Arial"/>
@@ -8336,9 +8338,9 @@
               </a:defRPr>
             </a:pPr>
             <a:r>
-              <a:rPr sz="1350" b="1">
-                <a:solidFill>
-                  <a:srgbClr val="FFFFFF"/>
+              <a:rPr sz="1125" b="1">
+                <a:solidFill>
+                  <a:srgbClr val="2C6E73"/>
                 </a:solidFill>
                 <a:latin typeface="Arial"/>
                 <a:ea typeface="Arial"/>
@@ -8354,19 +8356,19 @@
           <p:cNvPr id="13" name="">
             <a:extLst xmlns:a="http://schemas.openxmlformats.org/drawingml/2006/main">
               <a:ext uri="{FF2B5EF4-FFF2-40B4-BE49-F238E27FC236}">
-                <a16:creationId xmlns:a16="http://schemas.microsoft.com/office/drawing/2014/main" id="{256EEF68-D261-461F-BB9B-045675B0F105}"/>
-              </a:ext>
-            </a:extLst>
-          </p:cNvPr>
-          <p:cNvSpPr>
-            <a:spLocks xmlns:a="http://schemas.openxmlformats.org/drawingml/2006/main" noGrp="1"/>
-          </p:cNvSpPr>
-          <p:nvPr/>
-        </p:nvSpPr>
-        <p:spPr>
-          <a:xfrm xmlns:a="http://schemas.openxmlformats.org/drawingml/2006/main">
-            <a:off x="1714500" y="2181225"/>
-            <a:ext cx="9429750" cy="609600"/>
+                <a16:creationId xmlns:a16="http://schemas.microsoft.com/office/drawing/2014/main" id="{EE4660E5-6D46-4758-989A-44121896B04F}"/>
+              </a:ext>
+            </a:extLst>
+          </p:cNvPr>
+          <p:cNvSpPr>
+            <a:spLocks xmlns:a="http://schemas.openxmlformats.org/drawingml/2006/main" noGrp="1"/>
+          </p:cNvSpPr>
+          <p:nvPr/>
+        </p:nvSpPr>
+        <p:spPr>
+          <a:xfrm xmlns:a="http://schemas.openxmlformats.org/drawingml/2006/main">
+            <a:off x="1714500" y="2114550"/>
+            <a:ext cx="9525000" cy="809625"/>
           </a:xfrm>
           <a:prstGeom xmlns:a="http://schemas.openxmlformats.org/drawingml/2006/main" prst="rect">
             <a:avLst/>
@@ -8383,7 +8385,7 @@
           <a:lstStyle xmlns:a="http://schemas.openxmlformats.org/drawingml/2006/main"/>
           <a:p xmlns:a="http://schemas.openxmlformats.org/drawingml/2006/main">
             <a:pPr algn="l">
-              <a:defRPr sz="1500" b="0">
+              <a:defRPr sz="1725" b="0">
                 <a:solidFill>
                   <a:srgbClr val="17253A"/>
                 </a:solidFill>
@@ -8393,7 +8395,7 @@
               </a:defRPr>
             </a:pPr>
             <a:r>
-              <a:rPr sz="1500" b="0">
+              <a:rPr sz="1725" b="0">
                 <a:solidFill>
                   <a:srgbClr val="17253A"/>
                 </a:solidFill>
@@ -8401,7 +8403,7 @@
                 <a:ea typeface="Arial"/>
                 <a:cs typeface="Arial"/>
               </a:rPr>
-              <a:t>Identify the structure: Identify which quantities the ratio compares and keep their order.</a:t>
+              <a:t>36 : 48</a:t>
             </a:r>
           </a:p>
         </p:txBody>
@@ -8411,28 +8413,30 @@
           <p:cNvPr id="14" name="">
             <a:extLst xmlns:a="http://schemas.openxmlformats.org/drawingml/2006/main">
               <a:ext uri="{FF2B5EF4-FFF2-40B4-BE49-F238E27FC236}">
-                <a16:creationId xmlns:a16="http://schemas.microsoft.com/office/drawing/2014/main" id="{D286E5CD-60E7-4066-85AD-E1FF34A672E2}"/>
-              </a:ext>
-            </a:extLst>
-          </p:cNvPr>
-          <p:cNvSpPr>
-            <a:spLocks xmlns:a="http://schemas.openxmlformats.org/drawingml/2006/main" noGrp="1"/>
-          </p:cNvSpPr>
-          <p:nvPr/>
-        </p:nvSpPr>
-        <p:spPr>
-          <a:xfrm xmlns:a="http://schemas.openxmlformats.org/drawingml/2006/main">
-            <a:off x="1000125" y="2990850"/>
-            <a:ext cx="476250" cy="476250"/>
-          </a:xfrm>
-          <a:prstGeom xmlns:a="http://schemas.openxmlformats.org/drawingml/2006/main" prst="ellipse">
+                <a16:creationId xmlns:a16="http://schemas.microsoft.com/office/drawing/2014/main" id="{F5C38961-16B7-48EC-9118-F1F7BCB65452}"/>
+              </a:ext>
+            </a:extLst>
+          </p:cNvPr>
+          <p:cNvSpPr>
+            <a:spLocks xmlns:a="http://schemas.openxmlformats.org/drawingml/2006/main" noGrp="1"/>
+          </p:cNvSpPr>
+          <p:nvPr/>
+        </p:nvSpPr>
+        <p:spPr>
+          <a:xfrm xmlns:a="http://schemas.openxmlformats.org/drawingml/2006/main">
+            <a:off x="1714500" y="2943225"/>
+            <a:ext cx="9334500" cy="9525"/>
+          </a:xfrm>
+          <a:prstGeom xmlns:a="http://schemas.openxmlformats.org/drawingml/2006/main" prst="rect">
             <a:avLst/>
           </a:prstGeom>
           <a:solidFill xmlns:a="http://schemas.openxmlformats.org/drawingml/2006/main">
-            <a:srgbClr val="2C6E73"/>
+            <a:srgbClr val="D9E0E6"/>
           </a:solidFill>
           <a:ln xmlns:a="http://schemas.openxmlformats.org/drawingml/2006/main" w="0">
-            <a:noFill/>
+            <a:solidFill>
+              <a:srgbClr val="D9E0E6"/>
+            </a:solidFill>
           </a:ln>
         </p:spPr>
       </p:sp>
@@ -8441,19 +8445,19 @@
           <p:cNvPr id="15" name="">
             <a:extLst xmlns:a="http://schemas.openxmlformats.org/drawingml/2006/main">
               <a:ext uri="{FF2B5EF4-FFF2-40B4-BE49-F238E27FC236}">
-                <a16:creationId xmlns:a16="http://schemas.microsoft.com/office/drawing/2014/main" id="{5363FD90-202F-4198-8186-84065C85097F}"/>
-              </a:ext>
-            </a:extLst>
-          </p:cNvPr>
-          <p:cNvSpPr>
-            <a:spLocks xmlns:a="http://schemas.openxmlformats.org/drawingml/2006/main" noGrp="1"/>
-          </p:cNvSpPr>
-          <p:nvPr/>
-        </p:nvSpPr>
-        <p:spPr>
-          <a:xfrm xmlns:a="http://schemas.openxmlformats.org/drawingml/2006/main">
-            <a:off x="1000125" y="3019425"/>
-            <a:ext cx="476250" cy="419100"/>
+                <a16:creationId xmlns:a16="http://schemas.microsoft.com/office/drawing/2014/main" id="{65568A1B-8F1C-4975-A186-1743F18C5C63}"/>
+              </a:ext>
+            </a:extLst>
+          </p:cNvPr>
+          <p:cNvSpPr>
+            <a:spLocks xmlns:a="http://schemas.openxmlformats.org/drawingml/2006/main" noGrp="1"/>
+          </p:cNvSpPr>
+          <p:nvPr/>
+        </p:nvSpPr>
+        <p:spPr>
+          <a:xfrm xmlns:a="http://schemas.openxmlformats.org/drawingml/2006/main">
+            <a:off x="1162050" y="3076575"/>
+            <a:ext cx="400050" cy="400050"/>
           </a:xfrm>
           <a:prstGeom xmlns:a="http://schemas.openxmlformats.org/drawingml/2006/main" prst="rect">
             <a:avLst/>
@@ -8470,9 +8474,9 @@
           <a:lstStyle xmlns:a="http://schemas.openxmlformats.org/drawingml/2006/main"/>
           <a:p xmlns:a="http://schemas.openxmlformats.org/drawingml/2006/main">
             <a:pPr algn="ctr">
-              <a:defRPr sz="1350" b="1">
-                <a:solidFill>
-                  <a:srgbClr val="FFFFFF"/>
+              <a:defRPr sz="1125" b="1">
+                <a:solidFill>
+                  <a:srgbClr val="2C6E73"/>
                 </a:solidFill>
                 <a:latin typeface="Arial"/>
                 <a:ea typeface="Arial"/>
@@ -8480,9 +8484,9 @@
               </a:defRPr>
             </a:pPr>
             <a:r>
-              <a:rPr sz="1350" b="1">
-                <a:solidFill>
-                  <a:srgbClr val="FFFFFF"/>
+              <a:rPr sz="1125" b="1">
+                <a:solidFill>
+                  <a:srgbClr val="2C6E73"/>
                 </a:solidFill>
                 <a:latin typeface="Arial"/>
                 <a:ea typeface="Arial"/>
@@ -8498,19 +8502,19 @@
           <p:cNvPr id="16" name="">
             <a:extLst xmlns:a="http://schemas.openxmlformats.org/drawingml/2006/main">
               <a:ext uri="{FF2B5EF4-FFF2-40B4-BE49-F238E27FC236}">
-                <a16:creationId xmlns:a16="http://schemas.microsoft.com/office/drawing/2014/main" id="{57FE9DF8-DF85-41B9-8453-206EFE35EF84}"/>
-              </a:ext>
-            </a:extLst>
-          </p:cNvPr>
-          <p:cNvSpPr>
-            <a:spLocks xmlns:a="http://schemas.openxmlformats.org/drawingml/2006/main" noGrp="1"/>
-          </p:cNvSpPr>
-          <p:nvPr/>
-        </p:nvSpPr>
-        <p:spPr>
-          <a:xfrm xmlns:a="http://schemas.openxmlformats.org/drawingml/2006/main">
-            <a:off x="1714500" y="2924175"/>
-            <a:ext cx="9429750" cy="609600"/>
+                <a16:creationId xmlns:a16="http://schemas.microsoft.com/office/drawing/2014/main" id="{8EF97249-34A4-4A32-8FF2-8C163D477ECE}"/>
+              </a:ext>
+            </a:extLst>
+          </p:cNvPr>
+          <p:cNvSpPr>
+            <a:spLocks xmlns:a="http://schemas.openxmlformats.org/drawingml/2006/main" noGrp="1"/>
+          </p:cNvSpPr>
+          <p:nvPr/>
+        </p:nvSpPr>
+        <p:spPr>
+          <a:xfrm xmlns:a="http://schemas.openxmlformats.org/drawingml/2006/main">
+            <a:off x="1714500" y="2990850"/>
+            <a:ext cx="9525000" cy="809625"/>
           </a:xfrm>
           <a:prstGeom xmlns:a="http://schemas.openxmlformats.org/drawingml/2006/main" prst="rect">
             <a:avLst/>
@@ -8527,7 +8531,7 @@
           <a:lstStyle xmlns:a="http://schemas.openxmlformats.org/drawingml/2006/main"/>
           <a:p xmlns:a="http://schemas.openxmlformats.org/drawingml/2006/main">
             <a:pPr algn="l">
-              <a:defRPr sz="1500" b="0">
+              <a:defRPr sz="1725" b="0">
                 <a:solidFill>
                   <a:srgbClr val="17253A"/>
                 </a:solidFill>
@@ -8537,7 +8541,7 @@
               </a:defRPr>
             </a:pPr>
             <a:r>
-              <a:rPr sz="1500" b="0">
+              <a:rPr sz="1725" b="0">
                 <a:solidFill>
                   <a:srgbClr val="17253A"/>
                 </a:solidFill>
@@ -8545,7 +8549,7 @@
                 <a:ea typeface="Arial"/>
                 <a:cs typeface="Arial"/>
               </a:rPr>
-              <a:t>Set up the method: Scale both parts by the same factor.</a:t>
+              <a:t>HCF(36, 48) = 12</a:t>
             </a:r>
           </a:p>
         </p:txBody>
@@ -8555,28 +8559,30 @@
           <p:cNvPr id="17" name="">
             <a:extLst xmlns:a="http://schemas.openxmlformats.org/drawingml/2006/main">
               <a:ext uri="{FF2B5EF4-FFF2-40B4-BE49-F238E27FC236}">
-                <a16:creationId xmlns:a16="http://schemas.microsoft.com/office/drawing/2014/main" id="{94FDA682-57A0-4124-A05A-3A6F665D3470}"/>
-              </a:ext>
-            </a:extLst>
-          </p:cNvPr>
-          <p:cNvSpPr>
-            <a:spLocks xmlns:a="http://schemas.openxmlformats.org/drawingml/2006/main" noGrp="1"/>
-          </p:cNvSpPr>
-          <p:nvPr/>
-        </p:nvSpPr>
-        <p:spPr>
-          <a:xfrm xmlns:a="http://schemas.openxmlformats.org/drawingml/2006/main">
-            <a:off x="1000125" y="3733800"/>
-            <a:ext cx="476250" cy="476250"/>
-          </a:xfrm>
-          <a:prstGeom xmlns:a="http://schemas.openxmlformats.org/drawingml/2006/main" prst="ellipse">
+                <a16:creationId xmlns:a16="http://schemas.microsoft.com/office/drawing/2014/main" id="{B954F2E6-4FB5-43ED-AF8F-E4D9522EF84C}"/>
+              </a:ext>
+            </a:extLst>
+          </p:cNvPr>
+          <p:cNvSpPr>
+            <a:spLocks xmlns:a="http://schemas.openxmlformats.org/drawingml/2006/main" noGrp="1"/>
+          </p:cNvSpPr>
+          <p:nvPr/>
+        </p:nvSpPr>
+        <p:spPr>
+          <a:xfrm xmlns:a="http://schemas.openxmlformats.org/drawingml/2006/main">
+            <a:off x="1714500" y="3819525"/>
+            <a:ext cx="9334500" cy="9525"/>
+          </a:xfrm>
+          <a:prstGeom xmlns:a="http://schemas.openxmlformats.org/drawingml/2006/main" prst="rect">
             <a:avLst/>
           </a:prstGeom>
           <a:solidFill xmlns:a="http://schemas.openxmlformats.org/drawingml/2006/main">
-            <a:srgbClr val="2C6E73"/>
+            <a:srgbClr val="D9E0E6"/>
           </a:solidFill>
           <a:ln xmlns:a="http://schemas.openxmlformats.org/drawingml/2006/main" w="0">
-            <a:noFill/>
+            <a:solidFill>
+              <a:srgbClr val="D9E0E6"/>
+            </a:solidFill>
           </a:ln>
         </p:spPr>
       </p:sp>
@@ -8585,19 +8591,19 @@
           <p:cNvPr id="18" name="">
             <a:extLst xmlns:a="http://schemas.openxmlformats.org/drawingml/2006/main">
               <a:ext uri="{FF2B5EF4-FFF2-40B4-BE49-F238E27FC236}">
-                <a16:creationId xmlns:a16="http://schemas.microsoft.com/office/drawing/2014/main" id="{6B7F7195-FAE4-489A-A10F-BC43AC831E8E}"/>
-              </a:ext>
-            </a:extLst>
-          </p:cNvPr>
-          <p:cNvSpPr>
-            <a:spLocks xmlns:a="http://schemas.openxmlformats.org/drawingml/2006/main" noGrp="1"/>
-          </p:cNvSpPr>
-          <p:nvPr/>
-        </p:nvSpPr>
-        <p:spPr>
-          <a:xfrm xmlns:a="http://schemas.openxmlformats.org/drawingml/2006/main">
-            <a:off x="1000125" y="3762375"/>
-            <a:ext cx="476250" cy="419100"/>
+                <a16:creationId xmlns:a16="http://schemas.microsoft.com/office/drawing/2014/main" id="{12A6B00F-BCE0-4471-BDF4-C99345DA3CDC}"/>
+              </a:ext>
+            </a:extLst>
+          </p:cNvPr>
+          <p:cNvSpPr>
+            <a:spLocks xmlns:a="http://schemas.openxmlformats.org/drawingml/2006/main" noGrp="1"/>
+          </p:cNvSpPr>
+          <p:nvPr/>
+        </p:nvSpPr>
+        <p:spPr>
+          <a:xfrm xmlns:a="http://schemas.openxmlformats.org/drawingml/2006/main">
+            <a:off x="1162050" y="3952875"/>
+            <a:ext cx="400050" cy="400050"/>
           </a:xfrm>
           <a:prstGeom xmlns:a="http://schemas.openxmlformats.org/drawingml/2006/main" prst="rect">
             <a:avLst/>
@@ -8614,9 +8620,9 @@
           <a:lstStyle xmlns:a="http://schemas.openxmlformats.org/drawingml/2006/main"/>
           <a:p xmlns:a="http://schemas.openxmlformats.org/drawingml/2006/main">
             <a:pPr algn="ctr">
-              <a:defRPr sz="1350" b="1">
-                <a:solidFill>
-                  <a:srgbClr val="FFFFFF"/>
+              <a:defRPr sz="1125" b="1">
+                <a:solidFill>
+                  <a:srgbClr val="2C6E73"/>
                 </a:solidFill>
                 <a:latin typeface="Arial"/>
                 <a:ea typeface="Arial"/>
@@ -8624,9 +8630,9 @@
               </a:defRPr>
             </a:pPr>
             <a:r>
-              <a:rPr sz="1350" b="1">
-                <a:solidFill>
-                  <a:srgbClr val="FFFFFF"/>
+              <a:rPr sz="1125" b="1">
+                <a:solidFill>
+                  <a:srgbClr val="2C6E73"/>
                 </a:solidFill>
                 <a:latin typeface="Arial"/>
                 <a:ea typeface="Arial"/>
@@ -8642,19 +8648,19 @@
           <p:cNvPr id="19" name="">
             <a:extLst xmlns:a="http://schemas.openxmlformats.org/drawingml/2006/main">
               <a:ext uri="{FF2B5EF4-FFF2-40B4-BE49-F238E27FC236}">
-                <a16:creationId xmlns:a16="http://schemas.microsoft.com/office/drawing/2014/main" id="{794102C9-202B-440F-81F0-C203ACC26C7A}"/>
-              </a:ext>
-            </a:extLst>
-          </p:cNvPr>
-          <p:cNvSpPr>
-            <a:spLocks xmlns:a="http://schemas.openxmlformats.org/drawingml/2006/main" noGrp="1"/>
-          </p:cNvSpPr>
-          <p:nvPr/>
-        </p:nvSpPr>
-        <p:spPr>
-          <a:xfrm xmlns:a="http://schemas.openxmlformats.org/drawingml/2006/main">
-            <a:off x="1714500" y="3667125"/>
-            <a:ext cx="9429750" cy="609600"/>
+                <a16:creationId xmlns:a16="http://schemas.microsoft.com/office/drawing/2014/main" id="{044F62B7-4ABE-40F8-8F19-660175873B55}"/>
+              </a:ext>
+            </a:extLst>
+          </p:cNvPr>
+          <p:cNvSpPr>
+            <a:spLocks xmlns:a="http://schemas.openxmlformats.org/drawingml/2006/main" noGrp="1"/>
+          </p:cNvSpPr>
+          <p:nvPr/>
+        </p:nvSpPr>
+        <p:spPr>
+          <a:xfrm xmlns:a="http://schemas.openxmlformats.org/drawingml/2006/main">
+            <a:off x="1714500" y="3867150"/>
+            <a:ext cx="9525000" cy="809625"/>
           </a:xfrm>
           <a:prstGeom xmlns:a="http://schemas.openxmlformats.org/drawingml/2006/main" prst="rect">
             <a:avLst/>
@@ -8671,7 +8677,7 @@
           <a:lstStyle xmlns:a="http://schemas.openxmlformats.org/drawingml/2006/main"/>
           <a:p xmlns:a="http://schemas.openxmlformats.org/drawingml/2006/main">
             <a:pPr algn="l">
-              <a:defRPr sz="1500" b="0">
+              <a:defRPr sz="1725" b="0">
                 <a:solidFill>
                   <a:srgbClr val="17253A"/>
                 </a:solidFill>
@@ -8681,7 +8687,7 @@
               </a:defRPr>
             </a:pPr>
             <a:r>
-              <a:rPr sz="1500" b="0">
+              <a:rPr sz="1725" b="0">
                 <a:solidFill>
                   <a:srgbClr val="17253A"/>
                 </a:solidFill>
@@ -8689,7 +8695,7 @@
                 <a:ea typeface="Arial"/>
                 <a:cs typeface="Arial"/>
               </a:rPr>
-              <a:t>Complete the calculation: 3:4.</a:t>
+              <a:t>36 ÷ 12 : 48 ÷ 12</a:t>
             </a:r>
           </a:p>
         </p:txBody>
@@ -8699,28 +8705,30 @@
           <p:cNvPr id="20" name="">
             <a:extLst xmlns:a="http://schemas.openxmlformats.org/drawingml/2006/main">
               <a:ext uri="{FF2B5EF4-FFF2-40B4-BE49-F238E27FC236}">
-                <a16:creationId xmlns:a16="http://schemas.microsoft.com/office/drawing/2014/main" id="{2E58F7B1-31E3-4E1D-83B2-EBDCFF1E8DE5}"/>
-              </a:ext>
-            </a:extLst>
-          </p:cNvPr>
-          <p:cNvSpPr>
-            <a:spLocks xmlns:a="http://schemas.openxmlformats.org/drawingml/2006/main" noGrp="1"/>
-          </p:cNvSpPr>
-          <p:nvPr/>
-        </p:nvSpPr>
-        <p:spPr>
-          <a:xfrm xmlns:a="http://schemas.openxmlformats.org/drawingml/2006/main">
-            <a:off x="1000125" y="4476750"/>
-            <a:ext cx="476250" cy="476250"/>
-          </a:xfrm>
-          <a:prstGeom xmlns:a="http://schemas.openxmlformats.org/drawingml/2006/main" prst="ellipse">
+                <a16:creationId xmlns:a16="http://schemas.microsoft.com/office/drawing/2014/main" id="{058D54C6-13DA-4288-B831-CD699DB688BA}"/>
+              </a:ext>
+            </a:extLst>
+          </p:cNvPr>
+          <p:cNvSpPr>
+            <a:spLocks xmlns:a="http://schemas.openxmlformats.org/drawingml/2006/main" noGrp="1"/>
+          </p:cNvSpPr>
+          <p:nvPr/>
+        </p:nvSpPr>
+        <p:spPr>
+          <a:xfrm xmlns:a="http://schemas.openxmlformats.org/drawingml/2006/main">
+            <a:off x="1714500" y="4695825"/>
+            <a:ext cx="9334500" cy="9525"/>
+          </a:xfrm>
+          <a:prstGeom xmlns:a="http://schemas.openxmlformats.org/drawingml/2006/main" prst="rect">
             <a:avLst/>
           </a:prstGeom>
           <a:solidFill xmlns:a="http://schemas.openxmlformats.org/drawingml/2006/main">
-            <a:srgbClr val="2C6E73"/>
+            <a:srgbClr val="D9E0E6"/>
           </a:solidFill>
           <a:ln xmlns:a="http://schemas.openxmlformats.org/drawingml/2006/main" w="0">
-            <a:noFill/>
+            <a:solidFill>
+              <a:srgbClr val="D9E0E6"/>
+            </a:solidFill>
           </a:ln>
         </p:spPr>
       </p:sp>
@@ -8729,19 +8737,19 @@
           <p:cNvPr id="21" name="">
             <a:extLst xmlns:a="http://schemas.openxmlformats.org/drawingml/2006/main">
               <a:ext uri="{FF2B5EF4-FFF2-40B4-BE49-F238E27FC236}">
-                <a16:creationId xmlns:a16="http://schemas.microsoft.com/office/drawing/2014/main" id="{7A48E7F1-6B56-488F-AC77-0FEA16020C74}"/>
-              </a:ext>
-            </a:extLst>
-          </p:cNvPr>
-          <p:cNvSpPr>
-            <a:spLocks xmlns:a="http://schemas.openxmlformats.org/drawingml/2006/main" noGrp="1"/>
-          </p:cNvSpPr>
-          <p:nvPr/>
-        </p:nvSpPr>
-        <p:spPr>
-          <a:xfrm xmlns:a="http://schemas.openxmlformats.org/drawingml/2006/main">
-            <a:off x="1000125" y="4505325"/>
-            <a:ext cx="476250" cy="419100"/>
+                <a16:creationId xmlns:a16="http://schemas.microsoft.com/office/drawing/2014/main" id="{1255A588-7ED6-4264-A715-F1C10BA82E55}"/>
+              </a:ext>
+            </a:extLst>
+          </p:cNvPr>
+          <p:cNvSpPr>
+            <a:spLocks xmlns:a="http://schemas.openxmlformats.org/drawingml/2006/main" noGrp="1"/>
+          </p:cNvSpPr>
+          <p:nvPr/>
+        </p:nvSpPr>
+        <p:spPr>
+          <a:xfrm xmlns:a="http://schemas.openxmlformats.org/drawingml/2006/main">
+            <a:off x="1162050" y="4829175"/>
+            <a:ext cx="400050" cy="400050"/>
           </a:xfrm>
           <a:prstGeom xmlns:a="http://schemas.openxmlformats.org/drawingml/2006/main" prst="rect">
             <a:avLst/>
@@ -8758,9 +8766,9 @@
           <a:lstStyle xmlns:a="http://schemas.openxmlformats.org/drawingml/2006/main"/>
           <a:p xmlns:a="http://schemas.openxmlformats.org/drawingml/2006/main">
             <a:pPr algn="ctr">
-              <a:defRPr sz="1350" b="1">
-                <a:solidFill>
-                  <a:srgbClr val="FFFFFF"/>
+              <a:defRPr sz="1125" b="1">
+                <a:solidFill>
+                  <a:srgbClr val="2F785D"/>
                 </a:solidFill>
                 <a:latin typeface="Arial"/>
                 <a:ea typeface="Arial"/>
@@ -8768,9 +8776,9 @@
               </a:defRPr>
             </a:pPr>
             <a:r>
-              <a:rPr sz="1350" b="1">
-                <a:solidFill>
-                  <a:srgbClr val="FFFFFF"/>
+              <a:rPr sz="1125" b="1">
+                <a:solidFill>
+                  <a:srgbClr val="2F785D"/>
                 </a:solidFill>
                 <a:latin typeface="Arial"/>
                 <a:ea typeface="Arial"/>
@@ -8786,19 +8794,19 @@
           <p:cNvPr id="22" name="">
             <a:extLst xmlns:a="http://schemas.openxmlformats.org/drawingml/2006/main">
               <a:ext uri="{FF2B5EF4-FFF2-40B4-BE49-F238E27FC236}">
-                <a16:creationId xmlns:a16="http://schemas.microsoft.com/office/drawing/2014/main" id="{CEEF691E-BE1E-4C5D-BDFD-98EA92D2184A}"/>
-              </a:ext>
-            </a:extLst>
-          </p:cNvPr>
-          <p:cNvSpPr>
-            <a:spLocks xmlns:a="http://schemas.openxmlformats.org/drawingml/2006/main" noGrp="1"/>
-          </p:cNvSpPr>
-          <p:nvPr/>
-        </p:nvSpPr>
-        <p:spPr>
-          <a:xfrm xmlns:a="http://schemas.openxmlformats.org/drawingml/2006/main">
-            <a:off x="1714500" y="4410075"/>
-            <a:ext cx="9429750" cy="609600"/>
+                <a16:creationId xmlns:a16="http://schemas.microsoft.com/office/drawing/2014/main" id="{D54ED4AE-3758-4A38-8C84-93A5A639BAF1}"/>
+              </a:ext>
+            </a:extLst>
+          </p:cNvPr>
+          <p:cNvSpPr>
+            <a:spLocks xmlns:a="http://schemas.openxmlformats.org/drawingml/2006/main" noGrp="1"/>
+          </p:cNvSpPr>
+          <p:nvPr/>
+        </p:nvSpPr>
+        <p:spPr>
+          <a:xfrm xmlns:a="http://schemas.openxmlformats.org/drawingml/2006/main">
+            <a:off x="1714500" y="4743450"/>
+            <a:ext cx="9525000" cy="809625"/>
           </a:xfrm>
           <a:prstGeom xmlns:a="http://schemas.openxmlformats.org/drawingml/2006/main" prst="rect">
             <a:avLst/>
@@ -8815,7 +8823,7 @@
           <a:lstStyle xmlns:a="http://schemas.openxmlformats.org/drawingml/2006/main"/>
           <a:p xmlns:a="http://schemas.openxmlformats.org/drawingml/2006/main">
             <a:pPr algn="l">
-              <a:defRPr sz="1500" b="1">
+              <a:defRPr sz="1725" b="1">
                 <a:solidFill>
                   <a:srgbClr val="2F785D"/>
                 </a:solidFill>
@@ -8825,7 +8833,7 @@
               </a:defRPr>
             </a:pPr>
             <a:r>
-              <a:rPr sz="1500" b="1">
+              <a:rPr sz="1725" b="1">
                 <a:solidFill>
                   <a:srgbClr val="2F785D"/>
                 </a:solidFill>
@@ -8833,7 +8841,7 @@
                 <a:ea typeface="Arial"/>
                 <a:cs typeface="Arial"/>
               </a:rPr>
-              <a:t>Check the result: Check the relationship using a table, bar or sentence.</a:t>
+              <a:t>3 : 4</a:t>
             </a:r>
           </a:p>
         </p:txBody>
@@ -8841,7 +8849,7 @@
     </p:spTree>
     <p:extLst>
       <p:ext uri="{BB962C8B-B14F-4D97-AF65-F5344CB8AC3E}">
-        <p14:creationId xmlns:p14="http://schemas.microsoft.com/office/powerpoint/2010/main" val="950844758"/>
+        <p14:creationId xmlns:p14="http://schemas.microsoft.com/office/powerpoint/2010/main" val="963522180"/>
       </p:ext>
     </p:extLst>
   </p:cSld>
@@ -9134,7 +9142,7 @@
           <p:cNvPr id="15" name="">
             <a:extLst xmlns:a="http://schemas.openxmlformats.org/drawingml/2006/main">
               <a:ext uri="{FF2B5EF4-FFF2-40B4-BE49-F238E27FC236}">
-                <a16:creationId xmlns:a16="http://schemas.microsoft.com/office/drawing/2014/main" id="{024C48F3-BF54-4D95-BDCF-B7B1E82FF8FB}"/>
+                <a16:creationId xmlns:a16="http://schemas.microsoft.com/office/drawing/2014/main" id="{75A9FCB3-E4B0-47A5-AA1D-C2E9E3E19A58}"/>
               </a:ext>
             </a:extLst>
           </p:cNvPr>
@@ -9166,7 +9174,7 @@
           <p:cNvPr id="2" name="">
             <a:extLst xmlns:a="http://schemas.openxmlformats.org/drawingml/2006/main">
               <a:ext uri="{FF2B5EF4-FFF2-40B4-BE49-F238E27FC236}">
-                <a16:creationId xmlns:a16="http://schemas.microsoft.com/office/drawing/2014/main" id="{5EFE942E-5AEE-4D6F-B6A4-5D1C98843108}"/>
+                <a16:creationId xmlns:a16="http://schemas.microsoft.com/office/drawing/2014/main" id="{B10CDF05-40DB-4AB9-99C5-2E6B19122F28}"/>
               </a:ext>
             </a:extLst>
           </p:cNvPr>
@@ -9223,7 +9231,7 @@
           <p:cNvPr id="3" name="">
             <a:extLst xmlns:a="http://schemas.openxmlformats.org/drawingml/2006/main">
               <a:ext uri="{FF2B5EF4-FFF2-40B4-BE49-F238E27FC236}">
-                <a16:creationId xmlns:a16="http://schemas.microsoft.com/office/drawing/2014/main" id="{E2431CA2-80F9-4709-B7EC-52210F26D2A6}"/>
+                <a16:creationId xmlns:a16="http://schemas.microsoft.com/office/drawing/2014/main" id="{D139F543-EC6A-4488-B126-F1349495B187}"/>
               </a:ext>
             </a:extLst>
           </p:cNvPr>
@@ -9255,7 +9263,7 @@
           <p:cNvPr id="4" name="">
             <a:extLst xmlns:a="http://schemas.openxmlformats.org/drawingml/2006/main">
               <a:ext uri="{FF2B5EF4-FFF2-40B4-BE49-F238E27FC236}">
-                <a16:creationId xmlns:a16="http://schemas.microsoft.com/office/drawing/2014/main" id="{C81F2BB9-14C1-4F57-A219-FE379AC042AA}"/>
+                <a16:creationId xmlns:a16="http://schemas.microsoft.com/office/drawing/2014/main" id="{39CA33BC-D488-4BE0-B57E-A2B5781EA02F}"/>
               </a:ext>
             </a:extLst>
           </p:cNvPr>
@@ -9312,7 +9320,7 @@
           <p:cNvPr id="5" name="">
             <a:extLst xmlns:a="http://schemas.openxmlformats.org/drawingml/2006/main">
               <a:ext uri="{FF2B5EF4-FFF2-40B4-BE49-F238E27FC236}">
-                <a16:creationId xmlns:a16="http://schemas.microsoft.com/office/drawing/2014/main" id="{0A423FB8-FAF7-433B-AD8A-E04A8047BB3C}"/>
+                <a16:creationId xmlns:a16="http://schemas.microsoft.com/office/drawing/2014/main" id="{1F8FEDEB-68CA-41B3-ADEC-438FD26F530C}"/>
               </a:ext>
             </a:extLst>
           </p:cNvPr>
@@ -9369,7 +9377,7 @@
           <p:cNvPr id="6" name="">
             <a:extLst xmlns:a="http://schemas.openxmlformats.org/drawingml/2006/main">
               <a:ext uri="{FF2B5EF4-FFF2-40B4-BE49-F238E27FC236}">
-                <a16:creationId xmlns:a16="http://schemas.microsoft.com/office/drawing/2014/main" id="{263B1B97-1FF4-43A7-B6C1-E43C93017AD9}"/>
+                <a16:creationId xmlns:a16="http://schemas.microsoft.com/office/drawing/2014/main" id="{9FCAF456-0446-4423-8F7A-255DBAD1D724}"/>
               </a:ext>
             </a:extLst>
           </p:cNvPr>
@@ -9426,7 +9434,7 @@
           <p:cNvPr id="7" name="">
             <a:extLst xmlns:a="http://schemas.openxmlformats.org/drawingml/2006/main">
               <a:ext uri="{FF2B5EF4-FFF2-40B4-BE49-F238E27FC236}">
-                <a16:creationId xmlns:a16="http://schemas.microsoft.com/office/drawing/2014/main" id="{C0302051-D85C-49E4-B6BE-85AA77DEE6AC}"/>
+                <a16:creationId xmlns:a16="http://schemas.microsoft.com/office/drawing/2014/main" id="{38FB014C-7465-460A-B9F0-DFA1280B4077}"/>
               </a:ext>
             </a:extLst>
           </p:cNvPr>
@@ -9458,7 +9466,7 @@
           <p:cNvPr id="8" name="">
             <a:extLst xmlns:a="http://schemas.openxmlformats.org/drawingml/2006/main">
               <a:ext uri="{FF2B5EF4-FFF2-40B4-BE49-F238E27FC236}">
-                <a16:creationId xmlns:a16="http://schemas.microsoft.com/office/drawing/2014/main" id="{D4D50164-79B9-4F4A-AD0C-643FCD9DE707}"/>
+                <a16:creationId xmlns:a16="http://schemas.microsoft.com/office/drawing/2014/main" id="{75882FF7-5E81-45E1-9630-52D64F77B96C}"/>
               </a:ext>
             </a:extLst>
           </p:cNvPr>
@@ -9515,7 +9523,7 @@
           <p:cNvPr id="9" name="">
             <a:extLst xmlns:a="http://schemas.openxmlformats.org/drawingml/2006/main">
               <a:ext uri="{FF2B5EF4-FFF2-40B4-BE49-F238E27FC236}">
-                <a16:creationId xmlns:a16="http://schemas.microsoft.com/office/drawing/2014/main" id="{F64E6506-0D43-4CE6-9B36-348847246355}"/>
+                <a16:creationId xmlns:a16="http://schemas.microsoft.com/office/drawing/2014/main" id="{F25368FF-9DC0-43F2-A02A-4180A2F2CA7F}"/>
               </a:ext>
             </a:extLst>
           </p:cNvPr>
@@ -9572,7 +9580,7 @@
           <p:cNvPr id="10" name="">
             <a:extLst xmlns:a="http://schemas.openxmlformats.org/drawingml/2006/main">
               <a:ext uri="{FF2B5EF4-FFF2-40B4-BE49-F238E27FC236}">
-                <a16:creationId xmlns:a16="http://schemas.microsoft.com/office/drawing/2014/main" id="{A5276F32-F3F2-490E-8E5C-466281A76727}"/>
+                <a16:creationId xmlns:a16="http://schemas.microsoft.com/office/drawing/2014/main" id="{A7EA3998-5EC3-40A7-A288-F3E40B5C5763}"/>
               </a:ext>
             </a:extLst>
           </p:cNvPr>
@@ -9629,7 +9637,7 @@
           <p:cNvPr id="11" name="">
             <a:extLst xmlns:a="http://schemas.openxmlformats.org/drawingml/2006/main">
               <a:ext uri="{FF2B5EF4-FFF2-40B4-BE49-F238E27FC236}">
-                <a16:creationId xmlns:a16="http://schemas.microsoft.com/office/drawing/2014/main" id="{0C475043-3205-4037-8932-7D3E78EAB9D2}"/>
+                <a16:creationId xmlns:a16="http://schemas.microsoft.com/office/drawing/2014/main" id="{EB7A822D-759E-4E62-B694-06F5F37807A1}"/>
               </a:ext>
             </a:extLst>
           </p:cNvPr>
@@ -9686,7 +9694,7 @@
           <p:cNvPr id="12" name="">
             <a:extLst xmlns:a="http://schemas.openxmlformats.org/drawingml/2006/main">
               <a:ext uri="{FF2B5EF4-FFF2-40B4-BE49-F238E27FC236}">
-                <a16:creationId xmlns:a16="http://schemas.microsoft.com/office/drawing/2014/main" id="{A115956C-3BEE-4962-81D1-5E1D4C3E531C}"/>
+                <a16:creationId xmlns:a16="http://schemas.microsoft.com/office/drawing/2014/main" id="{CEF34653-4DAB-416A-8909-617F4F7B1B56}"/>
               </a:ext>
             </a:extLst>
           </p:cNvPr>
@@ -9718,7 +9726,7 @@
           <p:cNvPr id="13" name="">
             <a:extLst xmlns:a="http://schemas.openxmlformats.org/drawingml/2006/main">
               <a:ext uri="{FF2B5EF4-FFF2-40B4-BE49-F238E27FC236}">
-                <a16:creationId xmlns:a16="http://schemas.microsoft.com/office/drawing/2014/main" id="{914799DC-6DC7-465B-9CA5-595366596F3E}"/>
+                <a16:creationId xmlns:a16="http://schemas.microsoft.com/office/drawing/2014/main" id="{7E35D51A-7E87-436D-930D-62F1201EBEB9}"/>
               </a:ext>
             </a:extLst>
           </p:cNvPr>
@@ -9775,7 +9783,7 @@
           <p:cNvPr id="14" name="">
             <a:extLst xmlns:a="http://schemas.openxmlformats.org/drawingml/2006/main">
               <a:ext uri="{FF2B5EF4-FFF2-40B4-BE49-F238E27FC236}">
-                <a16:creationId xmlns:a16="http://schemas.microsoft.com/office/drawing/2014/main" id="{2B7D4C2E-A020-4973-B1CA-F829BB997717}"/>
+                <a16:creationId xmlns:a16="http://schemas.microsoft.com/office/drawing/2014/main" id="{BAA756D5-DB58-420E-8E71-E5DFA875730D}"/>
               </a:ext>
             </a:extLst>
           </p:cNvPr>
@@ -9830,7 +9838,7 @@
     </p:spTree>
     <p:extLst>
       <p:ext uri="{BB962C8B-B14F-4D97-AF65-F5344CB8AC3E}">
-        <p14:creationId xmlns:p14="http://schemas.microsoft.com/office/powerpoint/2010/main" val="949157682"/>
+        <p14:creationId xmlns:p14="http://schemas.microsoft.com/office/powerpoint/2010/main" val="1345134769"/>
       </p:ext>
     </p:extLst>
   </p:cSld>
@@ -10031,7 +10039,7 @@
           <p:cNvPr id="16" name="">
             <a:extLst xmlns:a="http://schemas.openxmlformats.org/drawingml/2006/main">
               <a:ext uri="{FF2B5EF4-FFF2-40B4-BE49-F238E27FC236}">
-                <a16:creationId xmlns:a16="http://schemas.microsoft.com/office/drawing/2014/main" id="{B26484CC-3598-4712-AAD9-3D86B1C1EB71}"/>
+                <a16:creationId xmlns:a16="http://schemas.microsoft.com/office/drawing/2014/main" id="{8912B948-1C27-45D0-96B1-3DB18A6CBD41}"/>
               </a:ext>
             </a:extLst>
           </p:cNvPr>
@@ -10063,7 +10071,7 @@
           <p:cNvPr id="2" name="">
             <a:extLst xmlns:a="http://schemas.openxmlformats.org/drawingml/2006/main">
               <a:ext uri="{FF2B5EF4-FFF2-40B4-BE49-F238E27FC236}">
-                <a16:creationId xmlns:a16="http://schemas.microsoft.com/office/drawing/2014/main" id="{40413088-512F-4FC8-A10C-4F6E299F6C92}"/>
+                <a16:creationId xmlns:a16="http://schemas.microsoft.com/office/drawing/2014/main" id="{D6D0A0F4-1701-43C6-B833-D15EA7E202BB}"/>
               </a:ext>
             </a:extLst>
           </p:cNvPr>
@@ -10120,7 +10128,7 @@
           <p:cNvPr id="3" name="">
             <a:extLst xmlns:a="http://schemas.openxmlformats.org/drawingml/2006/main">
               <a:ext uri="{FF2B5EF4-FFF2-40B4-BE49-F238E27FC236}">
-                <a16:creationId xmlns:a16="http://schemas.microsoft.com/office/drawing/2014/main" id="{D7D4A832-9067-4DD7-84CF-27AA4D17CD2A}"/>
+                <a16:creationId xmlns:a16="http://schemas.microsoft.com/office/drawing/2014/main" id="{C068CCDB-35F4-4D9A-8219-070180A222F6}"/>
               </a:ext>
             </a:extLst>
           </p:cNvPr>
@@ -10152,7 +10160,7 @@
           <p:cNvPr id="4" name="">
             <a:extLst xmlns:a="http://schemas.openxmlformats.org/drawingml/2006/main">
               <a:ext uri="{FF2B5EF4-FFF2-40B4-BE49-F238E27FC236}">
-                <a16:creationId xmlns:a16="http://schemas.microsoft.com/office/drawing/2014/main" id="{3ED235FC-6A4C-4978-9B63-2F9A5AF79F67}"/>
+                <a16:creationId xmlns:a16="http://schemas.microsoft.com/office/drawing/2014/main" id="{9360CFF9-AC81-4455-9986-371484682866}"/>
               </a:ext>
             </a:extLst>
           </p:cNvPr>
@@ -10209,7 +10217,7 @@
           <p:cNvPr id="5" name="">
             <a:extLst xmlns:a="http://schemas.openxmlformats.org/drawingml/2006/main">
               <a:ext uri="{FF2B5EF4-FFF2-40B4-BE49-F238E27FC236}">
-                <a16:creationId xmlns:a16="http://schemas.microsoft.com/office/drawing/2014/main" id="{9B2517AE-6782-4B06-9877-51963A787C04}"/>
+                <a16:creationId xmlns:a16="http://schemas.microsoft.com/office/drawing/2014/main" id="{0E49945C-3EAE-4894-A8ED-9447B3171A67}"/>
               </a:ext>
             </a:extLst>
           </p:cNvPr>
@@ -10266,7 +10274,7 @@
           <p:cNvPr id="6" name="">
             <a:extLst xmlns:a="http://schemas.openxmlformats.org/drawingml/2006/main">
               <a:ext uri="{FF2B5EF4-FFF2-40B4-BE49-F238E27FC236}">
-                <a16:creationId xmlns:a16="http://schemas.microsoft.com/office/drawing/2014/main" id="{83E14C33-3D15-43BE-8282-F095C7AF1847}"/>
+                <a16:creationId xmlns:a16="http://schemas.microsoft.com/office/drawing/2014/main" id="{BC4AFB56-D75C-4454-97C2-ABC83DB407DC}"/>
               </a:ext>
             </a:extLst>
           </p:cNvPr>
@@ -10323,7 +10331,7 @@
           <p:cNvPr id="7" name="">
             <a:extLst xmlns:a="http://schemas.openxmlformats.org/drawingml/2006/main">
               <a:ext uri="{FF2B5EF4-FFF2-40B4-BE49-F238E27FC236}">
-                <a16:creationId xmlns:a16="http://schemas.microsoft.com/office/drawing/2014/main" id="{4E5F94AA-913A-4B7A-B111-863FDEAF3FB2}"/>
+                <a16:creationId xmlns:a16="http://schemas.microsoft.com/office/drawing/2014/main" id="{B2A27DD2-0E6F-4906-891D-297D72CD45F4}"/>
               </a:ext>
             </a:extLst>
           </p:cNvPr>
@@ -10355,7 +10363,7 @@
           <p:cNvPr id="8" name="">
             <a:extLst xmlns:a="http://schemas.openxmlformats.org/drawingml/2006/main">
               <a:ext uri="{FF2B5EF4-FFF2-40B4-BE49-F238E27FC236}">
-                <a16:creationId xmlns:a16="http://schemas.microsoft.com/office/drawing/2014/main" id="{3CB2CC90-9C7E-44FC-9335-F308F61D3486}"/>
+                <a16:creationId xmlns:a16="http://schemas.microsoft.com/office/drawing/2014/main" id="{38A961A9-2012-4339-8291-EFA92048F423}"/>
               </a:ext>
             </a:extLst>
           </p:cNvPr>
@@ -10412,7 +10420,7 @@
           <p:cNvPr id="9" name="">
             <a:extLst xmlns:a="http://schemas.openxmlformats.org/drawingml/2006/main">
               <a:ext uri="{FF2B5EF4-FFF2-40B4-BE49-F238E27FC236}">
-                <a16:creationId xmlns:a16="http://schemas.microsoft.com/office/drawing/2014/main" id="{C41548B9-EBB9-4259-B72A-779F23004289}"/>
+                <a16:creationId xmlns:a16="http://schemas.microsoft.com/office/drawing/2014/main" id="{2BBFB2E7-FEE5-436D-BFE2-B350E7FEC6D2}"/>
               </a:ext>
             </a:extLst>
           </p:cNvPr>
@@ -10469,7 +10477,7 @@
           <p:cNvPr id="10" name="">
             <a:extLst xmlns:a="http://schemas.openxmlformats.org/drawingml/2006/main">
               <a:ext uri="{FF2B5EF4-FFF2-40B4-BE49-F238E27FC236}">
-                <a16:creationId xmlns:a16="http://schemas.microsoft.com/office/drawing/2014/main" id="{F04D8A38-4FA2-40EB-B0E9-01715A4F301F}"/>
+                <a16:creationId xmlns:a16="http://schemas.microsoft.com/office/drawing/2014/main" id="{D0EB4768-F2B9-425D-91F8-242A6065BB72}"/>
               </a:ext>
             </a:extLst>
           </p:cNvPr>
@@ -10526,7 +10534,7 @@
           <p:cNvPr id="11" name="">
             <a:extLst xmlns:a="http://schemas.openxmlformats.org/drawingml/2006/main">
               <a:ext uri="{FF2B5EF4-FFF2-40B4-BE49-F238E27FC236}">
-                <a16:creationId xmlns:a16="http://schemas.microsoft.com/office/drawing/2014/main" id="{D6BA8F83-EB84-408A-9BBA-412E4D1834E3}"/>
+                <a16:creationId xmlns:a16="http://schemas.microsoft.com/office/drawing/2014/main" id="{5CF9223B-C86D-4A6D-9370-A89224C87A85}"/>
               </a:ext>
             </a:extLst>
           </p:cNvPr>
@@ -10583,7 +10591,7 @@
           <p:cNvPr id="12" name="">
             <a:extLst xmlns:a="http://schemas.openxmlformats.org/drawingml/2006/main">
               <a:ext uri="{FF2B5EF4-FFF2-40B4-BE49-F238E27FC236}">
-                <a16:creationId xmlns:a16="http://schemas.microsoft.com/office/drawing/2014/main" id="{B961D860-5B94-425C-AC43-E46DC3FAF469}"/>
+                <a16:creationId xmlns:a16="http://schemas.microsoft.com/office/drawing/2014/main" id="{6EB2BBED-8CC8-4C47-A6C6-BF56A3145FE4}"/>
               </a:ext>
             </a:extLst>
           </p:cNvPr>
@@ -10640,7 +10648,7 @@
           <p:cNvPr id="13" name="">
             <a:extLst xmlns:a="http://schemas.openxmlformats.org/drawingml/2006/main">
               <a:ext uri="{FF2B5EF4-FFF2-40B4-BE49-F238E27FC236}">
-                <a16:creationId xmlns:a16="http://schemas.microsoft.com/office/drawing/2014/main" id="{7F089F62-B186-46BE-AA62-BBA8743830BB}"/>
+                <a16:creationId xmlns:a16="http://schemas.microsoft.com/office/drawing/2014/main" id="{68B054E7-CC11-433A-9CFC-5BC7F12AA2D8}"/>
               </a:ext>
             </a:extLst>
           </p:cNvPr>
@@ -10697,7 +10705,7 @@
           <p:cNvPr id="14" name="">
             <a:extLst xmlns:a="http://schemas.openxmlformats.org/drawingml/2006/main">
               <a:ext uri="{FF2B5EF4-FFF2-40B4-BE49-F238E27FC236}">
-                <a16:creationId xmlns:a16="http://schemas.microsoft.com/office/drawing/2014/main" id="{2F308D41-9AEF-4430-826F-29F5DB72D0D9}"/>
+                <a16:creationId xmlns:a16="http://schemas.microsoft.com/office/drawing/2014/main" id="{FEFF0434-90CC-4746-9C68-864D82EABBD3}"/>
               </a:ext>
             </a:extLst>
           </p:cNvPr>
@@ -10754,7 +10762,7 @@
           <p:cNvPr id="15" name="">
             <a:extLst xmlns:a="http://schemas.openxmlformats.org/drawingml/2006/main">
               <a:ext uri="{FF2B5EF4-FFF2-40B4-BE49-F238E27FC236}">
-                <a16:creationId xmlns:a16="http://schemas.microsoft.com/office/drawing/2014/main" id="{469D0DCA-30E1-409C-82E2-5F9D07735E6E}"/>
+                <a16:creationId xmlns:a16="http://schemas.microsoft.com/office/drawing/2014/main" id="{727B1EDF-2DEC-437E-8FB9-D9CBA66B89C5}"/>
               </a:ext>
             </a:extLst>
           </p:cNvPr>
@@ -10809,7 +10817,7 @@
     </p:spTree>
     <p:extLst>
       <p:ext uri="{BB962C8B-B14F-4D97-AF65-F5344CB8AC3E}">
-        <p14:creationId xmlns:p14="http://schemas.microsoft.com/office/powerpoint/2010/main" val="1074877311"/>
+        <p14:creationId xmlns:p14="http://schemas.microsoft.com/office/powerpoint/2010/main" val="1471112317"/>
       </p:ext>
     </p:extLst>
   </p:cSld>
@@ -10964,7 +10972,7 @@
           <p:cNvPr id="16" name="">
             <a:extLst xmlns:a="http://schemas.openxmlformats.org/drawingml/2006/main">
               <a:ext uri="{FF2B5EF4-FFF2-40B4-BE49-F238E27FC236}">
-                <a16:creationId xmlns:a16="http://schemas.microsoft.com/office/drawing/2014/main" id="{16194803-6C47-4985-B398-92BEA3CF5792}"/>
+                <a16:creationId xmlns:a16="http://schemas.microsoft.com/office/drawing/2014/main" id="{9B23AD8C-7534-4CED-B4FC-90B8FA8115B0}"/>
               </a:ext>
             </a:extLst>
           </p:cNvPr>
@@ -10996,7 +11004,7 @@
           <p:cNvPr id="2" name="">
             <a:extLst xmlns:a="http://schemas.openxmlformats.org/drawingml/2006/main">
               <a:ext uri="{FF2B5EF4-FFF2-40B4-BE49-F238E27FC236}">
-                <a16:creationId xmlns:a16="http://schemas.microsoft.com/office/drawing/2014/main" id="{42596615-EE68-44D4-9B74-4FED61CBA467}"/>
+                <a16:creationId xmlns:a16="http://schemas.microsoft.com/office/drawing/2014/main" id="{399B5565-F557-4942-8B01-9C42E6FEB97B}"/>
               </a:ext>
             </a:extLst>
           </p:cNvPr>
@@ -11053,7 +11061,7 @@
           <p:cNvPr id="3" name="">
             <a:extLst xmlns:a="http://schemas.openxmlformats.org/drawingml/2006/main">
               <a:ext uri="{FF2B5EF4-FFF2-40B4-BE49-F238E27FC236}">
-                <a16:creationId xmlns:a16="http://schemas.microsoft.com/office/drawing/2014/main" id="{22FB4F54-434E-435B-AF69-5D87283F41A1}"/>
+                <a16:creationId xmlns:a16="http://schemas.microsoft.com/office/drawing/2014/main" id="{CD69DCAB-9594-4C89-B287-FAC245FAB120}"/>
               </a:ext>
             </a:extLst>
           </p:cNvPr>
@@ -11085,7 +11093,7 @@
           <p:cNvPr id="4" name="">
             <a:extLst xmlns:a="http://schemas.openxmlformats.org/drawingml/2006/main">
               <a:ext uri="{FF2B5EF4-FFF2-40B4-BE49-F238E27FC236}">
-                <a16:creationId xmlns:a16="http://schemas.microsoft.com/office/drawing/2014/main" id="{3BDDF396-A366-45F6-8F49-0329F20D4EBB}"/>
+                <a16:creationId xmlns:a16="http://schemas.microsoft.com/office/drawing/2014/main" id="{D10B099D-A52F-4DFF-83DD-4F0E4F305BBB}"/>
               </a:ext>
             </a:extLst>
           </p:cNvPr>
@@ -11142,7 +11150,7 @@
           <p:cNvPr id="5" name="">
             <a:extLst xmlns:a="http://schemas.openxmlformats.org/drawingml/2006/main">
               <a:ext uri="{FF2B5EF4-FFF2-40B4-BE49-F238E27FC236}">
-                <a16:creationId xmlns:a16="http://schemas.microsoft.com/office/drawing/2014/main" id="{837245CF-818C-4819-BD3B-54C9A71F682C}"/>
+                <a16:creationId xmlns:a16="http://schemas.microsoft.com/office/drawing/2014/main" id="{7E86ACC6-6611-49FD-A52E-E2DA4399D92E}"/>
               </a:ext>
             </a:extLst>
           </p:cNvPr>
@@ -11199,7 +11207,7 @@
           <p:cNvPr id="6" name="">
             <a:extLst xmlns:a="http://schemas.openxmlformats.org/drawingml/2006/main">
               <a:ext uri="{FF2B5EF4-FFF2-40B4-BE49-F238E27FC236}">
-                <a16:creationId xmlns:a16="http://schemas.microsoft.com/office/drawing/2014/main" id="{598E5C25-68CF-45AD-891E-F7AA343AD86D}"/>
+                <a16:creationId xmlns:a16="http://schemas.microsoft.com/office/drawing/2014/main" id="{5067BAF6-BC7C-4B61-A780-5465946ACD59}"/>
               </a:ext>
             </a:extLst>
           </p:cNvPr>
@@ -11256,7 +11264,7 @@
           <p:cNvPr id="7" name="">
             <a:extLst xmlns:a="http://schemas.openxmlformats.org/drawingml/2006/main">
               <a:ext uri="{FF2B5EF4-FFF2-40B4-BE49-F238E27FC236}">
-                <a16:creationId xmlns:a16="http://schemas.microsoft.com/office/drawing/2014/main" id="{4942687A-662C-46B7-AA76-0E7174FF04BF}"/>
+                <a16:creationId xmlns:a16="http://schemas.microsoft.com/office/drawing/2014/main" id="{1F1691CB-DDCA-405E-A93D-8CDEDBA32F26}"/>
               </a:ext>
             </a:extLst>
           </p:cNvPr>
@@ -11288,7 +11296,7 @@
           <p:cNvPr id="8" name="">
             <a:extLst xmlns:a="http://schemas.openxmlformats.org/drawingml/2006/main">
               <a:ext uri="{FF2B5EF4-FFF2-40B4-BE49-F238E27FC236}">
-                <a16:creationId xmlns:a16="http://schemas.microsoft.com/office/drawing/2014/main" id="{E606A5CD-346E-465A-ADB9-4A0ADA4F3B72}"/>
+                <a16:creationId xmlns:a16="http://schemas.microsoft.com/office/drawing/2014/main" id="{3886A235-BCAE-487A-A0AC-9105D8694607}"/>
               </a:ext>
             </a:extLst>
           </p:cNvPr>
@@ -11345,7 +11353,7 @@
           <p:cNvPr id="9" name="">
             <a:extLst xmlns:a="http://schemas.openxmlformats.org/drawingml/2006/main">
               <a:ext uri="{FF2B5EF4-FFF2-40B4-BE49-F238E27FC236}">
-                <a16:creationId xmlns:a16="http://schemas.microsoft.com/office/drawing/2014/main" id="{3CF161A6-1CFA-44CB-A401-A4B9D9C467D3}"/>
+                <a16:creationId xmlns:a16="http://schemas.microsoft.com/office/drawing/2014/main" id="{305046FD-08A7-4576-B822-42E20048D889}"/>
               </a:ext>
             </a:extLst>
           </p:cNvPr>
@@ -11406,7 +11414,7 @@
           <p:nvPr/>
         </p:nvPicPr>
         <p:blipFill>
-          <a:blip xmlns:r="http://schemas.openxmlformats.org/officeDocument/2006/relationships" xmlns:a="http://schemas.openxmlformats.org/drawingml/2006/main" r:embed="R547d70584ae54d44"/>
+          <a:blip xmlns:r="http://schemas.openxmlformats.org/officeDocument/2006/relationships" xmlns:a="http://schemas.openxmlformats.org/drawingml/2006/main" r:embed="R3e9ef072a08b4f34"/>
           <a:stretch xmlns:a="http://schemas.openxmlformats.org/drawingml/2006/main"/>
         </p:blipFill>
         <p:spPr>
@@ -11424,7 +11432,7 @@
           <p:cNvPr id="11" name="">
             <a:extLst xmlns:a="http://schemas.openxmlformats.org/drawingml/2006/main">
               <a:ext uri="{FF2B5EF4-FFF2-40B4-BE49-F238E27FC236}">
-                <a16:creationId xmlns:a16="http://schemas.microsoft.com/office/drawing/2014/main" id="{704A18A2-19C2-4DB9-8B1D-4E728D5747F3}"/>
+                <a16:creationId xmlns:a16="http://schemas.microsoft.com/office/drawing/2014/main" id="{0C27FEF5-72D5-4EC1-9FD7-4BFFC4DC6DB7}"/>
               </a:ext>
             </a:extLst>
           </p:cNvPr>
@@ -11481,7 +11489,7 @@
           <p:cNvPr id="12" name="">
             <a:extLst xmlns:a="http://schemas.openxmlformats.org/drawingml/2006/main">
               <a:ext uri="{FF2B5EF4-FFF2-40B4-BE49-F238E27FC236}">
-                <a16:creationId xmlns:a16="http://schemas.microsoft.com/office/drawing/2014/main" id="{0CA628FB-B70A-419B-A073-19FD7B864A64}"/>
+                <a16:creationId xmlns:a16="http://schemas.microsoft.com/office/drawing/2014/main" id="{B4B81C83-4023-4A1B-8A64-BFACC5EC67AF}"/>
               </a:ext>
             </a:extLst>
           </p:cNvPr>
@@ -11538,7 +11546,7 @@
           <p:cNvPr id="13" name="">
             <a:extLst xmlns:a="http://schemas.openxmlformats.org/drawingml/2006/main">
               <a:ext uri="{FF2B5EF4-FFF2-40B4-BE49-F238E27FC236}">
-                <a16:creationId xmlns:a16="http://schemas.microsoft.com/office/drawing/2014/main" id="{D63B81D2-694A-47BD-8495-F0D6E93AE578}"/>
+                <a16:creationId xmlns:a16="http://schemas.microsoft.com/office/drawing/2014/main" id="{5295148E-BC35-4DD0-B6A5-C118AF9AB98F}"/>
               </a:ext>
             </a:extLst>
           </p:cNvPr>
@@ -11570,7 +11578,7 @@
           <p:cNvPr id="14" name="">
             <a:extLst xmlns:a="http://schemas.openxmlformats.org/drawingml/2006/main">
               <a:ext uri="{FF2B5EF4-FFF2-40B4-BE49-F238E27FC236}">
-                <a16:creationId xmlns:a16="http://schemas.microsoft.com/office/drawing/2014/main" id="{2E5E1DCA-222C-4A54-A41F-9679B0F9F019}"/>
+                <a16:creationId xmlns:a16="http://schemas.microsoft.com/office/drawing/2014/main" id="{57AD5BD0-486E-42D5-B8A4-C628DEEA7C2E}"/>
               </a:ext>
             </a:extLst>
           </p:cNvPr>
@@ -11627,7 +11635,7 @@
           <p:cNvPr id="15" name="">
             <a:extLst xmlns:a="http://schemas.openxmlformats.org/drawingml/2006/main">
               <a:ext uri="{FF2B5EF4-FFF2-40B4-BE49-F238E27FC236}">
-                <a16:creationId xmlns:a16="http://schemas.microsoft.com/office/drawing/2014/main" id="{520FCA84-E272-4F1B-B4A8-6EB8E89666B2}"/>
+                <a16:creationId xmlns:a16="http://schemas.microsoft.com/office/drawing/2014/main" id="{5886DE6D-BBB0-4799-857F-DB623961DAD7}"/>
               </a:ext>
             </a:extLst>
           </p:cNvPr>
@@ -11682,7 +11690,7 @@
     </p:spTree>
     <p:extLst>
       <p:ext uri="{BB962C8B-B14F-4D97-AF65-F5344CB8AC3E}">
-        <p14:creationId xmlns:p14="http://schemas.microsoft.com/office/powerpoint/2010/main" val="1567187019"/>
+        <p14:creationId xmlns:p14="http://schemas.microsoft.com/office/powerpoint/2010/main" val="1573078963"/>
       </p:ext>
     </p:extLst>
   </p:cSld>
@@ -11837,7 +11845,7 @@
           <p:cNvPr id="23" name="">
             <a:extLst xmlns:a="http://schemas.openxmlformats.org/drawingml/2006/main">
               <a:ext uri="{FF2B5EF4-FFF2-40B4-BE49-F238E27FC236}">
-                <a16:creationId xmlns:a16="http://schemas.microsoft.com/office/drawing/2014/main" id="{D1CBDA07-92B1-4643-BEC5-85738BAE7783}"/>
+                <a16:creationId xmlns:a16="http://schemas.microsoft.com/office/drawing/2014/main" id="{1DD2B8D8-1580-4EA9-AB6B-D307B1A86E0C}"/>
               </a:ext>
             </a:extLst>
           </p:cNvPr>
@@ -11869,7 +11877,7 @@
           <p:cNvPr id="2" name="">
             <a:extLst xmlns:a="http://schemas.openxmlformats.org/drawingml/2006/main">
               <a:ext uri="{FF2B5EF4-FFF2-40B4-BE49-F238E27FC236}">
-                <a16:creationId xmlns:a16="http://schemas.microsoft.com/office/drawing/2014/main" id="{460F9482-ECD2-4125-8DE4-8E41F2FF14F6}"/>
+                <a16:creationId xmlns:a16="http://schemas.microsoft.com/office/drawing/2014/main" id="{1B99CE23-C2BA-45E6-9977-B8E8CCDD170E}"/>
               </a:ext>
             </a:extLst>
           </p:cNvPr>
@@ -11926,7 +11934,7 @@
           <p:cNvPr id="3" name="">
             <a:extLst xmlns:a="http://schemas.openxmlformats.org/drawingml/2006/main">
               <a:ext uri="{FF2B5EF4-FFF2-40B4-BE49-F238E27FC236}">
-                <a16:creationId xmlns:a16="http://schemas.microsoft.com/office/drawing/2014/main" id="{7EC8F478-A587-4420-8DF8-B0FE48F76D0E}"/>
+                <a16:creationId xmlns:a16="http://schemas.microsoft.com/office/drawing/2014/main" id="{B8ECAFC5-284E-4F71-A83E-66F89FA80BF7}"/>
               </a:ext>
             </a:extLst>
           </p:cNvPr>
@@ -11958,7 +11966,7 @@
           <p:cNvPr id="4" name="">
             <a:extLst xmlns:a="http://schemas.openxmlformats.org/drawingml/2006/main">
               <a:ext uri="{FF2B5EF4-FFF2-40B4-BE49-F238E27FC236}">
-                <a16:creationId xmlns:a16="http://schemas.microsoft.com/office/drawing/2014/main" id="{3519DF87-A084-4C13-B6D5-9807EE555E31}"/>
+                <a16:creationId xmlns:a16="http://schemas.microsoft.com/office/drawing/2014/main" id="{FBEE87E5-62EB-466E-8A40-6CA719F60490}"/>
               </a:ext>
             </a:extLst>
           </p:cNvPr>
@@ -12015,7 +12023,7 @@
           <p:cNvPr id="5" name="">
             <a:extLst xmlns:a="http://schemas.openxmlformats.org/drawingml/2006/main">
               <a:ext uri="{FF2B5EF4-FFF2-40B4-BE49-F238E27FC236}">
-                <a16:creationId xmlns:a16="http://schemas.microsoft.com/office/drawing/2014/main" id="{37071584-E7B1-4078-892F-3A518ADC9BE3}"/>
+                <a16:creationId xmlns:a16="http://schemas.microsoft.com/office/drawing/2014/main" id="{3FD665E4-1840-4D00-A8F6-06FE7148550A}"/>
               </a:ext>
             </a:extLst>
           </p:cNvPr>
@@ -12072,7 +12080,7 @@
           <p:cNvPr id="6" name="">
             <a:extLst xmlns:a="http://schemas.openxmlformats.org/drawingml/2006/main">
               <a:ext uri="{FF2B5EF4-FFF2-40B4-BE49-F238E27FC236}">
-                <a16:creationId xmlns:a16="http://schemas.microsoft.com/office/drawing/2014/main" id="{8FF96C0F-D501-480C-80BD-EC3CB4C5D0CD}"/>
+                <a16:creationId xmlns:a16="http://schemas.microsoft.com/office/drawing/2014/main" id="{92F9C75F-F6BB-4C27-8CC4-586D22E7D7DF}"/>
               </a:ext>
             </a:extLst>
           </p:cNvPr>
@@ -12129,7 +12137,7 @@
           <p:cNvPr id="7" name="">
             <a:extLst xmlns:a="http://schemas.openxmlformats.org/drawingml/2006/main">
               <a:ext uri="{FF2B5EF4-FFF2-40B4-BE49-F238E27FC236}">
-                <a16:creationId xmlns:a16="http://schemas.microsoft.com/office/drawing/2014/main" id="{67421566-AA68-476F-8DDE-5E814910767B}"/>
+                <a16:creationId xmlns:a16="http://schemas.microsoft.com/office/drawing/2014/main" id="{C9380495-852C-41E4-9CFB-FB96ABF0630B}"/>
               </a:ext>
             </a:extLst>
           </p:cNvPr>
@@ -12161,7 +12169,7 @@
           <p:cNvPr id="8" name="">
             <a:extLst xmlns:a="http://schemas.openxmlformats.org/drawingml/2006/main">
               <a:ext uri="{FF2B5EF4-FFF2-40B4-BE49-F238E27FC236}">
-                <a16:creationId xmlns:a16="http://schemas.microsoft.com/office/drawing/2014/main" id="{722FE977-57B3-4987-BA6D-09199190DB4F}"/>
+                <a16:creationId xmlns:a16="http://schemas.microsoft.com/office/drawing/2014/main" id="{9EBF89DB-BEA4-4AF7-9F6D-D9FB71C72A3F}"/>
               </a:ext>
             </a:extLst>
           </p:cNvPr>
@@ -12218,7 +12226,7 @@
           <p:cNvPr id="9" name="">
             <a:extLst xmlns:a="http://schemas.openxmlformats.org/drawingml/2006/main">
               <a:ext uri="{FF2B5EF4-FFF2-40B4-BE49-F238E27FC236}">
-                <a16:creationId xmlns:a16="http://schemas.microsoft.com/office/drawing/2014/main" id="{2009D34F-849E-42F8-B2A8-291C47596828}"/>
+                <a16:creationId xmlns:a16="http://schemas.microsoft.com/office/drawing/2014/main" id="{351DD541-7CF4-4138-9874-9299EA5E3BBA}"/>
               </a:ext>
             </a:extLst>
           </p:cNvPr>
@@ -12275,7 +12283,7 @@
           <p:cNvPr id="10" name="">
             <a:extLst xmlns:a="http://schemas.openxmlformats.org/drawingml/2006/main">
               <a:ext uri="{FF2B5EF4-FFF2-40B4-BE49-F238E27FC236}">
-                <a16:creationId xmlns:a16="http://schemas.microsoft.com/office/drawing/2014/main" id="{F5FF8E34-32A4-4BF6-87C4-FDDE39F464B0}"/>
+                <a16:creationId xmlns:a16="http://schemas.microsoft.com/office/drawing/2014/main" id="{A626F98F-DD28-48DF-9011-D6F56DCC17C0}"/>
               </a:ext>
             </a:extLst>
           </p:cNvPr>
@@ -12309,7 +12317,7 @@
           <p:cNvPr id="11" name="">
             <a:extLst xmlns:a="http://schemas.openxmlformats.org/drawingml/2006/main">
               <a:ext uri="{FF2B5EF4-FFF2-40B4-BE49-F238E27FC236}">
-                <a16:creationId xmlns:a16="http://schemas.microsoft.com/office/drawing/2014/main" id="{8B7B5C18-9603-4F17-AC3C-9AFC6ADAB758}"/>
+                <a16:creationId xmlns:a16="http://schemas.microsoft.com/office/drawing/2014/main" id="{1CEED8A4-56DA-47F1-A00B-2386BE072DA7}"/>
               </a:ext>
             </a:extLst>
           </p:cNvPr>
@@ -12341,7 +12349,7 @@
           <p:cNvPr id="12" name="">
             <a:extLst xmlns:a="http://schemas.openxmlformats.org/drawingml/2006/main">
               <a:ext uri="{FF2B5EF4-FFF2-40B4-BE49-F238E27FC236}">
-                <a16:creationId xmlns:a16="http://schemas.microsoft.com/office/drawing/2014/main" id="{F0419D42-2096-468D-A6F4-C7FD12929CC1}"/>
+                <a16:creationId xmlns:a16="http://schemas.microsoft.com/office/drawing/2014/main" id="{13555F36-CA30-437E-8E11-8F1465101A9E}"/>
               </a:ext>
             </a:extLst>
           </p:cNvPr>
@@ -12398,7 +12406,7 @@
           <p:cNvPr id="13" name="">
             <a:extLst xmlns:a="http://schemas.openxmlformats.org/drawingml/2006/main">
               <a:ext uri="{FF2B5EF4-FFF2-40B4-BE49-F238E27FC236}">
-                <a16:creationId xmlns:a16="http://schemas.microsoft.com/office/drawing/2014/main" id="{A515A083-4D4E-45C6-B982-D4A3D519A1CD}"/>
+                <a16:creationId xmlns:a16="http://schemas.microsoft.com/office/drawing/2014/main" id="{73FFC4C5-989C-4280-A00D-0C6B054EB16D}"/>
               </a:ext>
             </a:extLst>
           </p:cNvPr>
@@ -12455,7 +12463,7 @@
           <p:cNvPr id="14" name="">
             <a:extLst xmlns:a="http://schemas.openxmlformats.org/drawingml/2006/main">
               <a:ext uri="{FF2B5EF4-FFF2-40B4-BE49-F238E27FC236}">
-                <a16:creationId xmlns:a16="http://schemas.microsoft.com/office/drawing/2014/main" id="{BC75248A-CE3F-401C-9968-99049EA6E3D8}"/>
+                <a16:creationId xmlns:a16="http://schemas.microsoft.com/office/drawing/2014/main" id="{5CFF99E7-44C1-4FBA-9691-2A5501CE67A8}"/>
               </a:ext>
             </a:extLst>
           </p:cNvPr>
@@ -12489,7 +12497,7 @@
           <p:cNvPr id="15" name="">
             <a:extLst xmlns:a="http://schemas.openxmlformats.org/drawingml/2006/main">
               <a:ext uri="{FF2B5EF4-FFF2-40B4-BE49-F238E27FC236}">
-                <a16:creationId xmlns:a16="http://schemas.microsoft.com/office/drawing/2014/main" id="{6FEB6260-D9B9-4507-A911-096FC9401754}"/>
+                <a16:creationId xmlns:a16="http://schemas.microsoft.com/office/drawing/2014/main" id="{97289B42-7399-44FE-9529-E5B3C9FAE22E}"/>
               </a:ext>
             </a:extLst>
           </p:cNvPr>
@@ -12521,7 +12529,7 @@
           <p:cNvPr id="16" name="">
             <a:extLst xmlns:a="http://schemas.openxmlformats.org/drawingml/2006/main">
               <a:ext uri="{FF2B5EF4-FFF2-40B4-BE49-F238E27FC236}">
-                <a16:creationId xmlns:a16="http://schemas.microsoft.com/office/drawing/2014/main" id="{912782F0-4944-4F85-B644-227186DF8C9A}"/>
+                <a16:creationId xmlns:a16="http://schemas.microsoft.com/office/drawing/2014/main" id="{C7F399FB-7D2C-4C7D-B4BD-62248D3FF27C}"/>
               </a:ext>
             </a:extLst>
           </p:cNvPr>
@@ -12578,7 +12586,7 @@
           <p:cNvPr id="17" name="">
             <a:extLst xmlns:a="http://schemas.openxmlformats.org/drawingml/2006/main">
               <a:ext uri="{FF2B5EF4-FFF2-40B4-BE49-F238E27FC236}">
-                <a16:creationId xmlns:a16="http://schemas.microsoft.com/office/drawing/2014/main" id="{4886C1F8-1EFD-4253-BD62-B59685AB93F4}"/>
+                <a16:creationId xmlns:a16="http://schemas.microsoft.com/office/drawing/2014/main" id="{20B710DA-8B21-40AC-9283-814DA46752AD}"/>
               </a:ext>
             </a:extLst>
           </p:cNvPr>
@@ -12635,7 +12643,7 @@
           <p:cNvPr id="18" name="">
             <a:extLst xmlns:a="http://schemas.openxmlformats.org/drawingml/2006/main">
               <a:ext uri="{FF2B5EF4-FFF2-40B4-BE49-F238E27FC236}">
-                <a16:creationId xmlns:a16="http://schemas.microsoft.com/office/drawing/2014/main" id="{387F64D9-6068-477D-99F4-0C4176945E3E}"/>
+                <a16:creationId xmlns:a16="http://schemas.microsoft.com/office/drawing/2014/main" id="{946D58FB-78F9-40BE-86BD-DB235BC147A0}"/>
               </a:ext>
             </a:extLst>
           </p:cNvPr>
@@ -12669,7 +12677,7 @@
           <p:cNvPr id="19" name="">
             <a:extLst xmlns:a="http://schemas.openxmlformats.org/drawingml/2006/main">
               <a:ext uri="{FF2B5EF4-FFF2-40B4-BE49-F238E27FC236}">
-                <a16:creationId xmlns:a16="http://schemas.microsoft.com/office/drawing/2014/main" id="{034FD153-08EB-47EA-B717-808D7C7E65AD}"/>
+                <a16:creationId xmlns:a16="http://schemas.microsoft.com/office/drawing/2014/main" id="{99BEC43F-5989-4CDD-8BB0-1E9CD0A9FE95}"/>
               </a:ext>
             </a:extLst>
           </p:cNvPr>
@@ -12701,7 +12709,7 @@
           <p:cNvPr id="20" name="">
             <a:extLst xmlns:a="http://schemas.openxmlformats.org/drawingml/2006/main">
               <a:ext uri="{FF2B5EF4-FFF2-40B4-BE49-F238E27FC236}">
-                <a16:creationId xmlns:a16="http://schemas.microsoft.com/office/drawing/2014/main" id="{E4D3BA31-A355-41D0-A75D-3313AD922CC3}"/>
+                <a16:creationId xmlns:a16="http://schemas.microsoft.com/office/drawing/2014/main" id="{9EC91FFD-62ED-4644-B5AB-B4EEBB56E4DB}"/>
               </a:ext>
             </a:extLst>
           </p:cNvPr>
@@ -12758,7 +12766,7 @@
           <p:cNvPr id="21" name="">
             <a:extLst xmlns:a="http://schemas.openxmlformats.org/drawingml/2006/main">
               <a:ext uri="{FF2B5EF4-FFF2-40B4-BE49-F238E27FC236}">
-                <a16:creationId xmlns:a16="http://schemas.microsoft.com/office/drawing/2014/main" id="{61F19C9E-E93F-4BE4-B87A-FA8912851EFB}"/>
+                <a16:creationId xmlns:a16="http://schemas.microsoft.com/office/drawing/2014/main" id="{46D79B74-752C-480F-AF1B-10B1D6A592FC}"/>
               </a:ext>
             </a:extLst>
           </p:cNvPr>
@@ -12815,7 +12823,7 @@
           <p:cNvPr id="22" name="">
             <a:extLst xmlns:a="http://schemas.openxmlformats.org/drawingml/2006/main">
               <a:ext uri="{FF2B5EF4-FFF2-40B4-BE49-F238E27FC236}">
-                <a16:creationId xmlns:a16="http://schemas.microsoft.com/office/drawing/2014/main" id="{9DC6B43D-EA46-4120-8B5E-4DA7B9CFD567}"/>
+                <a16:creationId xmlns:a16="http://schemas.microsoft.com/office/drawing/2014/main" id="{30EF2873-4A0B-4B1E-968E-44C23F26F9D5}"/>
               </a:ext>
             </a:extLst>
           </p:cNvPr>
@@ -12870,7 +12878,7 @@
     </p:spTree>
     <p:extLst>
       <p:ext uri="{BB962C8B-B14F-4D97-AF65-F5344CB8AC3E}">
-        <p14:creationId xmlns:p14="http://schemas.microsoft.com/office/powerpoint/2010/main" val="1260468592"/>
+        <p14:creationId xmlns:p14="http://schemas.microsoft.com/office/powerpoint/2010/main" val="1839088758"/>
       </p:ext>
     </p:extLst>
   </p:cSld>
@@ -13071,7 +13079,7 @@
           <p:cNvPr id="22" name="">
             <a:extLst xmlns:a="http://schemas.openxmlformats.org/drawingml/2006/main">
               <a:ext uri="{FF2B5EF4-FFF2-40B4-BE49-F238E27FC236}">
-                <a16:creationId xmlns:a16="http://schemas.microsoft.com/office/drawing/2014/main" id="{D5FC7BEA-E064-4904-B096-61D32511B2F5}"/>
+                <a16:creationId xmlns:a16="http://schemas.microsoft.com/office/drawing/2014/main" id="{ADD631D8-DA46-4760-A18D-C009EA428131}"/>
               </a:ext>
             </a:extLst>
           </p:cNvPr>
@@ -13103,7 +13111,7 @@
           <p:cNvPr id="2" name="">
             <a:extLst xmlns:a="http://schemas.openxmlformats.org/drawingml/2006/main">
               <a:ext uri="{FF2B5EF4-FFF2-40B4-BE49-F238E27FC236}">
-                <a16:creationId xmlns:a16="http://schemas.microsoft.com/office/drawing/2014/main" id="{6FEF798A-415A-4CF0-934D-C1861C71BC01}"/>
+                <a16:creationId xmlns:a16="http://schemas.microsoft.com/office/drawing/2014/main" id="{1ADC7C0D-5478-4881-9E32-760027C2E87A}"/>
               </a:ext>
             </a:extLst>
           </p:cNvPr>
@@ -13160,7 +13168,7 @@
           <p:cNvPr id="3" name="">
             <a:extLst xmlns:a="http://schemas.openxmlformats.org/drawingml/2006/main">
               <a:ext uri="{FF2B5EF4-FFF2-40B4-BE49-F238E27FC236}">
-                <a16:creationId xmlns:a16="http://schemas.microsoft.com/office/drawing/2014/main" id="{B52A2FF2-C614-4099-B84D-57C0CDA327E0}"/>
+                <a16:creationId xmlns:a16="http://schemas.microsoft.com/office/drawing/2014/main" id="{DA7C1E1C-0981-4C4D-8CEB-303823024004}"/>
               </a:ext>
             </a:extLst>
           </p:cNvPr>
@@ -13192,7 +13200,7 @@
           <p:cNvPr id="4" name="">
             <a:extLst xmlns:a="http://schemas.openxmlformats.org/drawingml/2006/main">
               <a:ext uri="{FF2B5EF4-FFF2-40B4-BE49-F238E27FC236}">
-                <a16:creationId xmlns:a16="http://schemas.microsoft.com/office/drawing/2014/main" id="{13778F2C-05E2-4351-9B5A-4E9903CF83EC}"/>
+                <a16:creationId xmlns:a16="http://schemas.microsoft.com/office/drawing/2014/main" id="{9B32EFBD-45FD-4B3C-A6C3-9575C62040CD}"/>
               </a:ext>
             </a:extLst>
           </p:cNvPr>
@@ -13249,7 +13257,7 @@
           <p:cNvPr id="5" name="">
             <a:extLst xmlns:a="http://schemas.openxmlformats.org/drawingml/2006/main">
               <a:ext uri="{FF2B5EF4-FFF2-40B4-BE49-F238E27FC236}">
-                <a16:creationId xmlns:a16="http://schemas.microsoft.com/office/drawing/2014/main" id="{0E6BF652-E8CA-433D-B485-81CF9CBEA602}"/>
+                <a16:creationId xmlns:a16="http://schemas.microsoft.com/office/drawing/2014/main" id="{085590C0-BD64-4C99-8998-0C29ECD11A39}"/>
               </a:ext>
             </a:extLst>
           </p:cNvPr>
@@ -13306,7 +13314,7 @@
           <p:cNvPr id="6" name="">
             <a:extLst xmlns:a="http://schemas.openxmlformats.org/drawingml/2006/main">
               <a:ext uri="{FF2B5EF4-FFF2-40B4-BE49-F238E27FC236}">
-                <a16:creationId xmlns:a16="http://schemas.microsoft.com/office/drawing/2014/main" id="{7585236D-8D58-4217-9F6B-642CFDF9D6D7}"/>
+                <a16:creationId xmlns:a16="http://schemas.microsoft.com/office/drawing/2014/main" id="{9303489F-9C39-4D57-8736-9BFA099E9E71}"/>
               </a:ext>
             </a:extLst>
           </p:cNvPr>
@@ -13363,7 +13371,7 @@
           <p:cNvPr id="7" name="">
             <a:extLst xmlns:a="http://schemas.openxmlformats.org/drawingml/2006/main">
               <a:ext uri="{FF2B5EF4-FFF2-40B4-BE49-F238E27FC236}">
-                <a16:creationId xmlns:a16="http://schemas.microsoft.com/office/drawing/2014/main" id="{29A892A5-D824-4198-A4D0-1BD9C9A10132}"/>
+                <a16:creationId xmlns:a16="http://schemas.microsoft.com/office/drawing/2014/main" id="{8795EB55-A114-475B-BD5B-E9AA4162B339}"/>
               </a:ext>
             </a:extLst>
           </p:cNvPr>
@@ -13395,7 +13403,7 @@
           <p:cNvPr id="8" name="">
             <a:extLst xmlns:a="http://schemas.openxmlformats.org/drawingml/2006/main">
               <a:ext uri="{FF2B5EF4-FFF2-40B4-BE49-F238E27FC236}">
-                <a16:creationId xmlns:a16="http://schemas.microsoft.com/office/drawing/2014/main" id="{EF194358-6B2A-42C3-8880-35D010B583B2}"/>
+                <a16:creationId xmlns:a16="http://schemas.microsoft.com/office/drawing/2014/main" id="{A4D6FD5D-7BC4-4E44-BA3A-4B5508D91B70}"/>
               </a:ext>
             </a:extLst>
           </p:cNvPr>
@@ -13452,7 +13460,7 @@
           <p:cNvPr id="9" name="">
             <a:extLst xmlns:a="http://schemas.openxmlformats.org/drawingml/2006/main">
               <a:ext uri="{FF2B5EF4-FFF2-40B4-BE49-F238E27FC236}">
-                <a16:creationId xmlns:a16="http://schemas.microsoft.com/office/drawing/2014/main" id="{690C56AE-1656-4688-923D-BFFAA383EF4F}"/>
+                <a16:creationId xmlns:a16="http://schemas.microsoft.com/office/drawing/2014/main" id="{A47083EE-2ABE-4C9C-AEAD-A16850EBEBDF}"/>
               </a:ext>
             </a:extLst>
           </p:cNvPr>
@@ -13509,7 +13517,7 @@
           <p:cNvPr id="10" name="">
             <a:extLst xmlns:a="http://schemas.openxmlformats.org/drawingml/2006/main">
               <a:ext uri="{FF2B5EF4-FFF2-40B4-BE49-F238E27FC236}">
-                <a16:creationId xmlns:a16="http://schemas.microsoft.com/office/drawing/2014/main" id="{3507E50F-5AF4-4788-B230-E506C111D657}"/>
+                <a16:creationId xmlns:a16="http://schemas.microsoft.com/office/drawing/2014/main" id="{242BF2C1-ED3F-436C-974E-30B33F8257F1}"/>
               </a:ext>
             </a:extLst>
           </p:cNvPr>
@@ -13543,7 +13551,7 @@
           <p:cNvPr id="11" name="">
             <a:extLst xmlns:a="http://schemas.openxmlformats.org/drawingml/2006/main">
               <a:ext uri="{FF2B5EF4-FFF2-40B4-BE49-F238E27FC236}">
-                <a16:creationId xmlns:a16="http://schemas.microsoft.com/office/drawing/2014/main" id="{780263D8-9B67-4B65-BB5F-3EDD484535E5}"/>
+                <a16:creationId xmlns:a16="http://schemas.microsoft.com/office/drawing/2014/main" id="{30D306FF-CC64-4F6B-A86E-44C106545BA2}"/>
               </a:ext>
             </a:extLst>
           </p:cNvPr>
@@ -13575,7 +13583,7 @@
           <p:cNvPr id="12" name="">
             <a:extLst xmlns:a="http://schemas.openxmlformats.org/drawingml/2006/main">
               <a:ext uri="{FF2B5EF4-FFF2-40B4-BE49-F238E27FC236}">
-                <a16:creationId xmlns:a16="http://schemas.microsoft.com/office/drawing/2014/main" id="{5221C9B2-F9C1-4181-AD33-10AE68382A91}"/>
+                <a16:creationId xmlns:a16="http://schemas.microsoft.com/office/drawing/2014/main" id="{3458D950-92D6-4D76-9C10-75008BCA4BF7}"/>
               </a:ext>
             </a:extLst>
           </p:cNvPr>
@@ -13632,7 +13640,7 @@
           <p:cNvPr id="13" name="">
             <a:extLst xmlns:a="http://schemas.openxmlformats.org/drawingml/2006/main">
               <a:ext uri="{FF2B5EF4-FFF2-40B4-BE49-F238E27FC236}">
-                <a16:creationId xmlns:a16="http://schemas.microsoft.com/office/drawing/2014/main" id="{2CF96A2F-723F-4EC2-8845-BA88F4004488}"/>
+                <a16:creationId xmlns:a16="http://schemas.microsoft.com/office/drawing/2014/main" id="{B7F4BB74-3820-4A3F-AFF5-0D29B837BDEE}"/>
               </a:ext>
             </a:extLst>
           </p:cNvPr>
@@ -13689,7 +13697,7 @@
           <p:cNvPr id="14" name="">
             <a:extLst xmlns:a="http://schemas.openxmlformats.org/drawingml/2006/main">
               <a:ext uri="{FF2B5EF4-FFF2-40B4-BE49-F238E27FC236}">
-                <a16:creationId xmlns:a16="http://schemas.microsoft.com/office/drawing/2014/main" id="{A54BE66E-D905-4311-A41C-CE5047CD0E03}"/>
+                <a16:creationId xmlns:a16="http://schemas.microsoft.com/office/drawing/2014/main" id="{C3E376D6-A5AA-4CBF-BC6B-81AB333741F9}"/>
               </a:ext>
             </a:extLst>
           </p:cNvPr>
@@ -13723,7 +13731,7 @@
           <p:cNvPr id="15" name="">
             <a:extLst xmlns:a="http://schemas.openxmlformats.org/drawingml/2006/main">
               <a:ext uri="{FF2B5EF4-FFF2-40B4-BE49-F238E27FC236}">
-                <a16:creationId xmlns:a16="http://schemas.microsoft.com/office/drawing/2014/main" id="{93AFB88B-3751-4FF7-98DE-32F1A38B2AA6}"/>
+                <a16:creationId xmlns:a16="http://schemas.microsoft.com/office/drawing/2014/main" id="{9B601E09-5102-4FCE-9B79-27A11A4E688B}"/>
               </a:ext>
             </a:extLst>
           </p:cNvPr>
@@ -13755,7 +13763,7 @@
           <p:cNvPr id="16" name="">
             <a:extLst xmlns:a="http://schemas.openxmlformats.org/drawingml/2006/main">
               <a:ext uri="{FF2B5EF4-FFF2-40B4-BE49-F238E27FC236}">
-                <a16:creationId xmlns:a16="http://schemas.microsoft.com/office/drawing/2014/main" id="{BA2FF096-B331-48D4-B466-D67BD786E05B}"/>
+                <a16:creationId xmlns:a16="http://schemas.microsoft.com/office/drawing/2014/main" id="{6AC5A560-9789-42D4-8163-853BCE074BCD}"/>
               </a:ext>
             </a:extLst>
           </p:cNvPr>
@@ -13812,7 +13820,7 @@
           <p:cNvPr id="17" name="">
             <a:extLst xmlns:a="http://schemas.openxmlformats.org/drawingml/2006/main">
               <a:ext uri="{FF2B5EF4-FFF2-40B4-BE49-F238E27FC236}">
-                <a16:creationId xmlns:a16="http://schemas.microsoft.com/office/drawing/2014/main" id="{9DC7E5A9-E87E-43C7-92E7-1D239EF0DDDB}"/>
+                <a16:creationId xmlns:a16="http://schemas.microsoft.com/office/drawing/2014/main" id="{0640C2AC-730B-4CF2-BC77-88D0D90FB93B}"/>
               </a:ext>
             </a:extLst>
           </p:cNvPr>
@@ -13869,7 +13877,7 @@
           <p:cNvPr id="18" name="">
             <a:extLst xmlns:a="http://schemas.openxmlformats.org/drawingml/2006/main">
               <a:ext uri="{FF2B5EF4-FFF2-40B4-BE49-F238E27FC236}">
-                <a16:creationId xmlns:a16="http://schemas.microsoft.com/office/drawing/2014/main" id="{E3AC29D1-58D4-428B-87E1-920A374D5B01}"/>
+                <a16:creationId xmlns:a16="http://schemas.microsoft.com/office/drawing/2014/main" id="{30263680-E1DC-44E4-B67D-F313057D0FDD}"/>
               </a:ext>
             </a:extLst>
           </p:cNvPr>
@@ -13903,7 +13911,7 @@
           <p:cNvPr id="19" name="">
             <a:extLst xmlns:a="http://schemas.openxmlformats.org/drawingml/2006/main">
               <a:ext uri="{FF2B5EF4-FFF2-40B4-BE49-F238E27FC236}">
-                <a16:creationId xmlns:a16="http://schemas.microsoft.com/office/drawing/2014/main" id="{C67CF468-0BBB-4578-BD2E-AC8EEB91246F}"/>
+                <a16:creationId xmlns:a16="http://schemas.microsoft.com/office/drawing/2014/main" id="{49958F81-17DA-4F2D-9402-6EDE9F8076A3}"/>
               </a:ext>
             </a:extLst>
           </p:cNvPr>
@@ -13935,7 +13943,7 @@
           <p:cNvPr id="20" name="">
             <a:extLst xmlns:a="http://schemas.openxmlformats.org/drawingml/2006/main">
               <a:ext uri="{FF2B5EF4-FFF2-40B4-BE49-F238E27FC236}">
-                <a16:creationId xmlns:a16="http://schemas.microsoft.com/office/drawing/2014/main" id="{CD78CCDB-AEF8-47A5-B58A-C1876D985D1A}"/>
+                <a16:creationId xmlns:a16="http://schemas.microsoft.com/office/drawing/2014/main" id="{21420EA8-7422-4A71-B133-B1084513D466}"/>
               </a:ext>
             </a:extLst>
           </p:cNvPr>
@@ -13992,7 +14000,7 @@
           <p:cNvPr id="21" name="">
             <a:extLst xmlns:a="http://schemas.openxmlformats.org/drawingml/2006/main">
               <a:ext uri="{FF2B5EF4-FFF2-40B4-BE49-F238E27FC236}">
-                <a16:creationId xmlns:a16="http://schemas.microsoft.com/office/drawing/2014/main" id="{5E294F94-DD28-416A-B6D8-92D16E6F8C18}"/>
+                <a16:creationId xmlns:a16="http://schemas.microsoft.com/office/drawing/2014/main" id="{83DBA363-BE65-4FEB-8164-B88E58D911B7}"/>
               </a:ext>
             </a:extLst>
           </p:cNvPr>
@@ -14047,7 +14055,7 @@
     </p:spTree>
     <p:extLst>
       <p:ext uri="{BB962C8B-B14F-4D97-AF65-F5344CB8AC3E}">
-        <p14:creationId xmlns:p14="http://schemas.microsoft.com/office/powerpoint/2010/main" val="1504236278"/>
+        <p14:creationId xmlns:p14="http://schemas.microsoft.com/office/powerpoint/2010/main" val="1589965167"/>
       </p:ext>
     </p:extLst>
   </p:cSld>
